--- a/deliverables/Soutenance_OpsForge_Dyllan_Thouvignon.pptx
+++ b/deliverables/Soutenance_OpsForge_Dyllan_Thouvignon.pptx
@@ -29,6 +29,7 @@
     <p:sldId id="277" r:id="rId29"/>
     <p:sldId id="278" r:id="rId30"/>
     <p:sldId id="279" r:id="rId31"/>
+    <p:sldId id="280" r:id="rId32"/>
   </p:sldIdLst>
   <p:sldSz cx="12191695" cy="6858000" type="screen4x3"/>
   <p:notesSz cx="6858000" cy="9144000"/>
@@ -1015,27 +1016,78 @@
           <a:p/>
           <a:p>
             <a:r>
-              <a:t>LE PIÈGE : le critère « les échanges avec les développeurs sont réguliers ». Réponse préparée :</a:t>
-            </a:r>
-          </a:p>
-          <a:p>
-            <a:r>
-              <a:t>« Projet individuel, je tiens les deux rôles — je ne peux pas revendiquer ce critère au sens strict.</a:t>
-            </a:r>
-          </a:p>
-          <a:p>
-            <a:r>
-              <a:t>Ce que je peux montrer, c'est que la boucle supervision → développement existe et qu'elle est tracée</a:t>
-            </a:r>
-          </a:p>
-          <a:p>
-            <a:r>
-              <a:t>dans mes décisions d'architecture : c'est la supervision qui m'a fait ajouter /ready, qui m'a fait</a:t>
-            </a:r>
-          </a:p>
-          <a:p>
-            <a:r>
-              <a:t>passer les labels de route en template. En équipe, ces constats seraient le contenu des échanges. »</a:t>
+              <a:t>LE PIÈGE : le critère « les échanges avec les développeurs sont réguliers ». Réponse préparée,</a:t>
+            </a:r>
+          </a:p>
+          <a:p>
+            <a:r>
+              <a:t>EN DEUX TEMPS depuis que le jury a mon dossier professionnel :</a:t>
+            </a:r>
+          </a:p>
+          <a:p>
+            <a:r>
+              <a:t>1. « Sur OpsForge, projet individuel, je tiens les deux rôles : je ne revendique pas ce critère au</a:t>
+            </a:r>
+          </a:p>
+          <a:p>
+            <a:r>
+              <a:t>   sens strict. La boucle supervision → développement existe et elle est tracée dans mes décisions</a:t>
+            </a:r>
+          </a:p>
+          <a:p>
+            <a:r>
+              <a:t>   d'architecture — c'est la supervision qui m'a fait ajouter /ready, passer les labels de route en</a:t>
+            </a:r>
+          </a:p>
+          <a:p>
+            <a:r>
+              <a:t>   template. »</a:t>
+            </a:r>
+          </a:p>
+          <a:p>
+            <a:r>
+              <a:t>2. « En revanche, mon dossier professionnel le couvre en contexte réel : supervision multi-clients,</a:t>
+            </a:r>
+          </a:p>
+          <a:p>
+            <a:r>
+              <a:t>   travail en équipe, et un module développé dans un dépôt partagé avec ses conventions. »</a:t>
+            </a:r>
+          </a:p>
+          <a:p>
+            <a:r>
+              <a:t>C'est le bon endroit pour renvoyer au DP : ne pas laisser croire que je n'ai jamais travaillé en équipe.</a:t>
+            </a:r>
+          </a:p>
+          <a:p/>
+          <a:p>
+            <a:r>
+              <a:t>LE FIL ROUGE À PLACER SI L'OCCASION SE PRÉSENTE — il relie mes deux dossiers :</a:t>
+            </a:r>
+          </a:p>
+          <a:p>
+            <a:r>
+              <a:t>dans mon dossier professionnel, un client signale une panne Internet réelle alors que la supervision</a:t>
+            </a:r>
+          </a:p>
+          <a:p>
+            <a:r>
+              <a:t>est « au vert » ; la cause était une licence de filtrage expirée, invisible du contrôle en place.</a:t>
+            </a:r>
+          </a:p>
+          <a:p>
+            <a:r>
+              <a:t>Ici, sur OpsForge, la CI est verte et les tests passent — et une revue manuelle trouve deux défauts</a:t>
+            </a:r>
+          </a:p>
+          <a:p>
+            <a:r>
+              <a:t>réels. Même leçon, deux contextes : un voyant vert ne dit pas que le service rend le service.</a:t>
+            </a:r>
+          </a:p>
+          <a:p>
+            <a:r>
+              <a:t>C'est ce qui m'a fait écrire une procédure de test manuelle et m'y tenir.</a:t>
             </a:r>
           </a:p>
         </p:txBody>
@@ -1452,7 +1504,54 @@
           </a:p>
           <a:p>
             <a:r>
-              <a:t>  Je note simplement que la documentation du dépôt et mes messages de commit sont en anglais.</a:t>
+              <a:t>  La documentation du dépôt et mes messages de commit sont en anglais ; et mon dossier professionnel</a:t>
+            </a:r>
+          </a:p>
+          <a:p>
+            <a:r>
+              <a:t>  mentionne des échanges techniques en anglais avec des référents clients.</a:t>
+            </a:r>
+          </a:p>
+          <a:p/>
+          <a:p>
+            <a:r>
+              <a:t>À AVOIR EN TÊTE : c'est OpsForge qui porte la compétence « Gérer des containers ». Rien dans mon</a:t>
+            </a:r>
+          </a:p>
+          <a:p>
+            <a:r>
+              <a:t>expérience professionnelle ne la démontre — aucun des six exemples de mon dossier professionnel ne</a:t>
+            </a:r>
+          </a:p>
+          <a:p>
+            <a:r>
+              <a:t>porte sur des containers. Ne pas survoler la slide CP 7 : sans elle, cette compétence obligatoire</a:t>
+            </a:r>
+          </a:p>
+          <a:p>
+            <a:r>
+              <a:t>n'est couverte nulle part.</a:t>
+            </a:r>
+          </a:p>
+          <a:p/>
+          <a:p>
+            <a:r>
+              <a:t>De même pour CP 2 : mon dossier professionnel montre de l'automatisation PowerShell, mais c'est du</a:t>
+            </a:r>
+          </a:p>
+          <a:p>
+            <a:r>
+              <a:t>provisionnement de comptes et de dossiers, pas du déploiement d'infrastructure. Le playbook Ansible</a:t>
+            </a:r>
+          </a:p>
+          <a:p>
+            <a:r>
+              <a:t>est ma seule preuve de « automatiser le déploiement d'une infrastructure ». C'est pour ça que la</a:t>
+            </a:r>
+          </a:p>
+          <a:p>
+            <a:r>
+              <a:t>slide Ansible est la pièce maîtresse.</a:t>
             </a:r>
           </a:p>
         </p:txBody>
@@ -2028,33 +2127,116 @@
           </a:p>
           <a:p>
             <a:r>
-              <a:t>- Mon activité en entreprise est restée orientée support : elle ne m'a pas donné un projet DevOps</a:t>
-            </a:r>
-          </a:p>
-          <a:p>
-            <a:r>
-              <a:t>  assez complet pour couvrir les attendus. J'ai donc construit le mien.</a:t>
-            </a:r>
-          </a:p>
-          <a:p>
-            <a:r>
-              <a:t>- Point important à énoncer clairement : ce n'est PAS un projet de mon entreprise. Aucune donnée,</a:t>
-            </a:r>
-          </a:p>
-          <a:p>
-            <a:r>
-              <a:t>  aucune infrastructure professionnelle. J'ai écrit le cahier des charges moi-même à partir du</a:t>
-            </a:r>
-          </a:p>
-          <a:p>
-            <a:r>
-              <a:t>  référentiel — ce que les modalités autorisent explicitement pour un projet hors entreprise.</a:t>
+              <a:t>- Mon activité a évolué : support et exploitation, puis systèmes et supervision, puis développement</a:t>
+            </a:r>
+          </a:p>
+          <a:p>
+            <a:r>
+              <a:t>  et intégration d'API. C'est ce que détaille mon dossier professionnel.</a:t>
+            </a:r>
+          </a:p>
+          <a:p>
+            <a:r>
+              <a:t>- Mais aucune de ces missions ne réunit à elle seule les trois compétences obligatoires du titre.</a:t>
+            </a:r>
+          </a:p>
+          <a:p>
+            <a:r>
+              <a:t>  J'ai donc construit un projet qui les réunit.</a:t>
+            </a:r>
+          </a:p>
+          <a:p>
+            <a:r>
+              <a:t>- Ce n'est PAS un projet de mon entreprise : aucune donnée, aucune infrastructure professionnelle.</a:t>
+            </a:r>
+          </a:p>
+          <a:p>
+            <a:r>
+              <a:t>  J'ai écrit le cahier des charges moi-même à partir du référentiel — ce que les modalités</a:t>
+            </a:r>
+          </a:p>
+          <a:p>
+            <a:r>
+              <a:t>  autorisent explicitement pour un projet hors entreprise.</a:t>
             </a:r>
           </a:p>
           <a:p/>
           <a:p>
             <a:r>
-              <a:t>Ne pas s'excuser. C'est un choix, pas un défaut. Enchaîner vite.</a:t>
+              <a:t>LA QUESTION QUI VIENDRA (le jury a mon dossier professionnel sous les yeux) :</a:t>
+            </a:r>
+          </a:p>
+          <a:p>
+            <a:r>
+              <a:t>« Votre DP montre de l'automatisation PowerShell, du développement d'API, de la supervision.</a:t>
+            </a:r>
+          </a:p>
+          <a:p>
+            <a:r>
+              <a:t>Pourquoi ne pas avoir présenté ça comme projet ? »</a:t>
+            </a:r>
+          </a:p>
+          <a:p/>
+          <a:p>
+            <a:r>
+              <a:t>Réponse, en trois temps :</a:t>
+            </a:r>
+          </a:p>
+          <a:p>
+            <a:r>
+              <a:t>1. Ce sont des interventions et un module applicatif, pas un projet avec un cahier des charges</a:t>
+            </a:r>
+          </a:p>
+          <a:p>
+            <a:r>
+              <a:t>   couvrant les trois compétences obligatoires.</a:t>
+            </a:r>
+          </a:p>
+          <a:p>
+            <a:r>
+              <a:t>2. Surtout : aucune de ces missions ne porte sur les containers. La compétence « Gérer des</a:t>
+            </a:r>
+          </a:p>
+          <a:p>
+            <a:r>
+              <a:t>   containers » est obligatoire, et rien dans mon expérience professionnelle ne la démontre.</a:t>
+            </a:r>
+          </a:p>
+          <a:p>
+            <a:r>
+              <a:t>3. Il me fallait donc un projet qui tienne les trois d'un bloc, avec des preuves rejouables.</a:t>
+            </a:r>
+          </a:p>
+          <a:p>
+            <a:r>
+              <a:t>   C'est exactement ce qu'est OpsForge.</a:t>
+            </a:r>
+          </a:p>
+          <a:p/>
+          <a:p>
+            <a:r>
+              <a:t>Ne pas se rabaisser : mon expérience professionnelle est réelle et le DP la porte. Ce projet la</a:t>
+            </a:r>
+          </a:p>
+          <a:p>
+            <a:r>
+              <a:t>complète, il ne la remplace pas.</a:t>
+            </a:r>
+          </a:p>
+          <a:p/>
+          <a:p>
+            <a:r>
+              <a:t>Autre question possible : « OpsForge en juin-août, et votre module applicatif sur la même période ? »</a:t>
+            </a:r>
+          </a:p>
+          <a:p>
+            <a:r>
+              <a:t>Oui — OpsForge a été mené en dehors du temps de travail, en phases courtes finies une à une.</a:t>
+            </a:r>
+          </a:p>
+          <a:p>
+            <a:r>
+              <a:t>C'est écrit dans le dossier.</a:t>
             </a:r>
           </a:p>
         </p:txBody>
@@ -2124,18 +2306,49 @@
           <a:lstStyle/>
           <a:p>
             <a:r>
-              <a:t>Réponses à connaître par cœur dans l'esprit, pas mot à mot.</a:t>
+              <a:t>À sortir si le jury demande pourquoi je n'ai pas présenté un projet d'entreprise, ou si l'entretien</a:t>
+            </a:r>
+          </a:p>
+          <a:p>
+            <a:r>
+              <a:t>technique creuse la frontière entre mes deux dossiers.</a:t>
             </a:r>
           </a:p>
           <a:p/>
           <a:p>
             <a:r>
-              <a:t>Règle d'or : reconnaître d'abord, expliquer ensuite, proposer la suite enfin.</a:t>
-            </a:r>
-          </a:p>
-          <a:p>
-            <a:r>
-              <a:t>Ne jamais défendre l'indéfendable — chaque limite a été choisie et documentée.</a:t>
+              <a:t>Le message : ces deux dossiers ne racontent pas la même chose et ne se contredisent pas.</a:t>
+            </a:r>
+          </a:p>
+          <a:p>
+            <a:r>
+              <a:t>- Mon expérience professionnelle porte la supervision réelle, le travail en équipe, l'automatisation</a:t>
+            </a:r>
+          </a:p>
+          <a:p>
+            <a:r>
+              <a:t>  d'administration et le développement applicatif.</a:t>
+            </a:r>
+          </a:p>
+          <a:p>
+            <a:r>
+              <a:t>- Elle ne porte PAS les containers, et son automatisation n'est pas du déploiement d'infrastructure.</a:t>
+            </a:r>
+          </a:p>
+          <a:p>
+            <a:r>
+              <a:t>- OpsForge apporte exactement ces deux pièces manquantes, avec des preuves rejouables.</a:t>
+            </a:r>
+          </a:p>
+          <a:p/>
+          <a:p>
+            <a:r>
+              <a:t>Ne pas opposer les deux. Ne pas non plus dévaloriser l'expérience professionnelle : elle est réelle,</a:t>
+            </a:r>
+          </a:p>
+          <a:p>
+            <a:r>
+              <a:t>documentée, et c'est elle qui m'a donné le sujet — la gestion d'incidents vient de mon quotidien.</a:t>
             </a:r>
           </a:p>
         </p:txBody>
@@ -2205,59 +2418,18 @@
           <a:lstStyle/>
           <a:p>
             <a:r>
-              <a:t>Deux autres à préparer, qui n'ont pas tenu sur la slide :</a:t>
+              <a:t>Réponses à connaître par cœur dans l'esprit, pas mot à mot.</a:t>
             </a:r>
           </a:p>
           <a:p/>
           <a:p>
             <a:r>
-              <a:t>« Quelle est la part de l'IA dans ce projet ? »</a:t>
-            </a:r>
-          </a:p>
-          <a:p>
-            <a:r>
-              <a:t>J'ai utilisé des assistants comme outils d'aide à la conception, à l'implémentation et à la revue,</a:t>
-            </a:r>
-          </a:p>
-          <a:p>
-            <a:r>
-              <a:t>selon des règles que j'ai écrites dans le dépôt. Je suis resté responsable du cadrage, des choix</a:t>
-            </a:r>
-          </a:p>
-          <a:p>
-            <a:r>
-              <a:t>techniques, des arbitrages et de la validation : chaque changement important a été vérifié et testé</a:t>
-            </a:r>
-          </a:p>
-          <a:p>
-            <a:r>
-              <a:t>avant intégration. C'est d'ailleurs ce processus qui donne au dépôt son cycle</a:t>
-            </a:r>
-          </a:p>
-          <a:p>
-            <a:r>
-              <a:t>proposition → implémentation → revue → correction → validation. Répondre calmement, sans gêne :</a:t>
-            </a:r>
-          </a:p>
-          <a:p>
-            <a:r>
-              <a:t>c'est un outil, la responsabilité reste la mienne.</a:t>
-            </a:r>
-          </a:p>
-          <a:p/>
-          <a:p>
-            <a:r>
-              <a:t>« Combien de temps le projet a-t-il pris ? »</a:t>
-            </a:r>
-          </a:p>
-          <a:p>
-            <a:r>
-              <a:t>Trois mois, de juin à août 2026, en parallèle de mon activité professionnelle, en six phases</a:t>
-            </a:r>
-          </a:p>
-          <a:p>
-            <a:r>
-              <a:t>validées une à une.</a:t>
+              <a:t>Règle d'or : reconnaître d'abord, expliquer ensuite, proposer la suite enfin.</a:t>
+            </a:r>
+          </a:p>
+          <a:p>
+            <a:r>
+              <a:t>Ne jamais défendre l'indéfendable — chaque limite a été choisie et documentée.</a:t>
             </a:r>
           </a:p>
         </p:txBody>
@@ -2327,18 +2499,59 @@
           <a:lstStyle/>
           <a:p>
             <a:r>
-              <a:t>À dégainer si on me demande un chiffre précis. Ne pas apprendre par cœur : savoir où regarder.</a:t>
+              <a:t>Deux autres à préparer, qui n'ont pas tenu sur la slide :</a:t>
             </a:r>
           </a:p>
           <a:p/>
           <a:p>
             <a:r>
-              <a:t>Le seul chiffre que je dois donner sans hésiter : 38 tests, et 45 commits sur la branche du candidat.</a:t>
-            </a:r>
-          </a:p>
-          <a:p>
-            <a:r>
-              <a:t>Et la date de validation de la phase 6 : le 19 août 2026.</a:t>
+              <a:t>« Quelle est la part de l'IA dans ce projet ? »</a:t>
+            </a:r>
+          </a:p>
+          <a:p>
+            <a:r>
+              <a:t>J'ai utilisé des assistants comme outils d'aide à la conception, à l'implémentation et à la revue,</a:t>
+            </a:r>
+          </a:p>
+          <a:p>
+            <a:r>
+              <a:t>selon des règles que j'ai écrites dans le dépôt. Je suis resté responsable du cadrage, des choix</a:t>
+            </a:r>
+          </a:p>
+          <a:p>
+            <a:r>
+              <a:t>techniques, des arbitrages et de la validation : chaque changement important a été vérifié et testé</a:t>
+            </a:r>
+          </a:p>
+          <a:p>
+            <a:r>
+              <a:t>avant intégration. C'est d'ailleurs ce processus qui donne au dépôt son cycle</a:t>
+            </a:r>
+          </a:p>
+          <a:p>
+            <a:r>
+              <a:t>proposition → implémentation → revue → correction → validation. Répondre calmement, sans gêne :</a:t>
+            </a:r>
+          </a:p>
+          <a:p>
+            <a:r>
+              <a:t>c'est un outil, la responsabilité reste la mienne.</a:t>
+            </a:r>
+          </a:p>
+          <a:p/>
+          <a:p>
+            <a:r>
+              <a:t>« Combien de temps le projet a-t-il pris ? »</a:t>
+            </a:r>
+          </a:p>
+          <a:p>
+            <a:r>
+              <a:t>Trois mois, de juin à août 2026, en parallèle de mon activité professionnelle, en six phases</a:t>
+            </a:r>
+          </a:p>
+          <a:p>
+            <a:r>
+              <a:t>validées une à une.</a:t>
             </a:r>
           </a:p>
         </p:txBody>
@@ -2408,44 +2621,18 @@
           <a:lstStyle/>
           <a:p>
             <a:r>
-              <a:t>Si le jury creuse le domaine métier ou veut vérifier que je maîtrise mon modèle.</a:t>
+              <a:t>À dégainer si on me demande un chiffre précis. Ne pas apprendre par cœur : savoir où regarder.</a:t>
             </a:r>
           </a:p>
           <a:p/>
           <a:p>
             <a:r>
-              <a:t>Le point qu'on me contestera peut-être : « pourquoi résoudre l'incident ne résout-il pas l'alerte ? »</a:t>
-            </a:r>
-          </a:p>
-          <a:p>
-            <a:r>
-              <a:t>Parce que ce sont deux cycles différents : l'alerte est un signal, l'incident est une prise en charge.</a:t>
-            </a:r>
-          </a:p>
-          <a:p>
-            <a:r>
-              <a:t>Un signal peut persister après la clôture d'une intervention, et deux alertes peuvent concerner</a:t>
-            </a:r>
-          </a:p>
-          <a:p>
-            <a:r>
-              <a:t>le même incident. Les lier automatiquement ferait perdre de l'information.</a:t>
-            </a:r>
-          </a:p>
-          <a:p/>
-          <a:p>
-            <a:r>
-              <a:t>Autre point : l'unicité de l'incident actif est garantie par l'application (409), pas par une</a:t>
-            </a:r>
-          </a:p>
-          <a:p>
-            <a:r>
-              <a:t>contrainte en base. En production multi-workers, il faudrait une contrainte partielle PostgreSQL —</a:t>
-            </a:r>
-          </a:p>
-          <a:p>
-            <a:r>
-              <a:t>c'est écrit dans ma dette technique.</a:t>
+              <a:t>Le seul chiffre que je dois donner sans hésiter : 38 tests, et 45 commits sur la branche du candidat.</a:t>
+            </a:r>
+          </a:p>
+          <a:p>
+            <a:r>
+              <a:t>Et la date de validation de la phase 6 : le 19 août 2026.</a:t>
             </a:r>
           </a:p>
         </p:txBody>
@@ -2471,6 +2658,113 @@
 </file>
 
 <file path=ppt/notesSlides/notesSlide24.xml><?xml version="1.0" encoding="utf-8"?>
+<p:notes xmlns:a="http://schemas.openxmlformats.org/drawingml/2006/main" xmlns:p="http://schemas.openxmlformats.org/presentationml/2006/main" xmlns:r="http://schemas.openxmlformats.org/officeDocument/2006/relationships">
+  <p:cSld>
+    <p:spTree>
+      <p:nvGrpSpPr>
+        <p:cNvPr id="1" name=""/>
+        <p:cNvGrpSpPr/>
+        <p:nvPr/>
+      </p:nvGrpSpPr>
+      <p:grpSpPr>
+        <a:xfrm>
+          <a:off x="0" y="0"/>
+          <a:ext cx="0" cy="0"/>
+          <a:chOff x="0" y="0"/>
+          <a:chExt cx="0" cy="0"/>
+        </a:xfrm>
+      </p:grpSpPr>
+      <p:sp>
+        <p:nvSpPr>
+          <p:cNvPr id="2" name="Slide Image Placeholder 1"/>
+          <p:cNvSpPr>
+            <a:spLocks noGrp="1"/>
+          </p:cNvSpPr>
+          <p:nvPr>
+            <p:ph type="sldImg" idx="2"/>
+          </p:nvPr>
+        </p:nvSpPr>
+        <p:spPr/>
+      </p:sp>
+      <p:sp>
+        <p:nvSpPr>
+          <p:cNvPr id="3" name="Notes Placeholder 2"/>
+          <p:cNvSpPr>
+            <a:spLocks noGrp="1"/>
+          </p:cNvSpPr>
+          <p:nvPr>
+            <p:ph type="body" idx="3" sz="quarter"/>
+          </p:nvPr>
+        </p:nvSpPr>
+        <p:spPr/>
+        <p:txBody>
+          <a:bodyPr/>
+          <a:lstStyle/>
+          <a:p>
+            <a:r>
+              <a:t>Si le jury creuse le domaine métier ou veut vérifier que je maîtrise mon modèle.</a:t>
+            </a:r>
+          </a:p>
+          <a:p/>
+          <a:p>
+            <a:r>
+              <a:t>Le point qu'on me contestera peut-être : « pourquoi résoudre l'incident ne résout-il pas l'alerte ? »</a:t>
+            </a:r>
+          </a:p>
+          <a:p>
+            <a:r>
+              <a:t>Parce que ce sont deux cycles différents : l'alerte est un signal, l'incident est une prise en charge.</a:t>
+            </a:r>
+          </a:p>
+          <a:p>
+            <a:r>
+              <a:t>Un signal peut persister après la clôture d'une intervention, et deux alertes peuvent concerner</a:t>
+            </a:r>
+          </a:p>
+          <a:p>
+            <a:r>
+              <a:t>le même incident. Les lier automatiquement ferait perdre de l'information.</a:t>
+            </a:r>
+          </a:p>
+          <a:p/>
+          <a:p>
+            <a:r>
+              <a:t>Autre point : l'unicité de l'incident actif est garantie par l'application (409), pas par une</a:t>
+            </a:r>
+          </a:p>
+          <a:p>
+            <a:r>
+              <a:t>contrainte en base. En production multi-workers, il faudrait une contrainte partielle PostgreSQL —</a:t>
+            </a:r>
+          </a:p>
+          <a:p>
+            <a:r>
+              <a:t>c'est écrit dans ma dette technique.</a:t>
+            </a:r>
+          </a:p>
+        </p:txBody>
+      </p:sp>
+      <p:sp>
+        <p:nvSpPr>
+          <p:cNvPr id="4" name="Slide Number Placeholder 3"/>
+          <p:cNvSpPr>
+            <a:spLocks noGrp="1"/>
+          </p:cNvSpPr>
+          <p:nvPr>
+            <p:ph type="sldNum" idx="5" sz="quarter"/>
+          </p:nvPr>
+        </p:nvSpPr>
+        <p:spPr/>
+      </p:sp>
+    </p:spTree>
+  </p:cSld>
+  <p:clrMapOvr>
+    <a:masterClrMapping/>
+  </p:clrMapOvr>
+</p:notes>
+</file>
+
+<file path=ppt/notesSlides/notesSlide25.xml><?xml version="1.0" encoding="utf-8"?>
 <p:notes xmlns:a="http://schemas.openxmlformats.org/drawingml/2006/main" xmlns:p="http://schemas.openxmlformats.org/presentationml/2006/main" xmlns:r="http://schemas.openxmlformats.org/officeDocument/2006/relationships">
   <p:cSld>
     <p:spTree>
@@ -16093,7 +16387,7 @@
         <p:spPr>
           <a:xfrm>
             <a:off x="658368" y="1618488"/>
-            <a:ext cx="3566160" cy="2377440"/>
+            <a:ext cx="3566160" cy="2651760"/>
           </a:xfrm>
           <a:prstGeom prst="roundRect">
             <a:avLst>
@@ -16141,7 +16435,7 @@
         <p:spPr>
           <a:xfrm>
             <a:off x="658368" y="1618488"/>
-            <a:ext cx="50292" cy="2377440"/>
+            <a:ext cx="50292" cy="2651760"/>
           </a:xfrm>
           <a:prstGeom prst="rect">
             <a:avLst/>
@@ -16405,7 +16699,7 @@
                 </a:solidFill>
                 <a:latin typeface="Segoe UI"/>
               </a:rPr>
-              <a:t>Activité orientée</a:t>
+              <a:t>Support et exploitation,</a:t>
             </a:r>
           </a:p>
         </p:txBody>
@@ -16444,21 +16738,60 @@
                 </a:solidFill>
                 <a:latin typeface="Segoe UI"/>
               </a:rPr>
-              <a:t>support technique.</a:t>
-            </a:r>
-          </a:p>
-        </p:txBody>
-      </p:sp>
-      <p:sp>
-        <p:nvSpPr>
-          <p:cNvPr id="16" name="Rounded Rectangle 15"/>
+              <a:t>puis systèmes, supervision</a:t>
+            </a:r>
+          </a:p>
+        </p:txBody>
+      </p:sp>
+      <p:sp>
+        <p:nvSpPr>
+          <p:cNvPr id="16" name="TextBox 15"/>
+          <p:cNvSpPr txBox="1"/>
+          <p:nvPr/>
+        </p:nvSpPr>
+        <p:spPr>
+          <a:xfrm>
+            <a:off x="914400" y="3813047"/>
+            <a:ext cx="3108960" cy="274320"/>
+          </a:xfrm>
+          <a:prstGeom prst="rect">
+            <a:avLst/>
+          </a:prstGeom>
+          <a:noFill/>
+        </p:spPr>
+        <p:txBody>
+          <a:bodyPr wrap="square" lIns="0" rIns="0" tIns="0" bIns="0" anchor="t">
+            <a:spAutoFit/>
+          </a:bodyPr>
+          <a:lstStyle/>
+          <a:p>
+            <a:pPr algn="l">
+              <a:lnSpc>
+                <a:spcPct val="95000"/>
+              </a:lnSpc>
+            </a:pPr>
+            <a:r>
+              <a:rPr sz="1350" b="0" i="0">
+                <a:solidFill>
+                  <a:srgbClr val="1E293B"/>
+                </a:solidFill>
+                <a:latin typeface="Segoe UI"/>
+              </a:rPr>
+              <a:t>et développement.</a:t>
+            </a:r>
+          </a:p>
+        </p:txBody>
+      </p:sp>
+      <p:sp>
+        <p:nvSpPr>
+          <p:cNvPr id="17" name="Rounded Rectangle 16"/>
           <p:cNvSpPr/>
           <p:nvPr/>
         </p:nvSpPr>
         <p:spPr>
           <a:xfrm>
             <a:off x="4453128" y="1618488"/>
-            <a:ext cx="3566160" cy="2377440"/>
+            <a:ext cx="3566160" cy="2926080"/>
           </a:xfrm>
           <a:prstGeom prst="roundRect">
             <a:avLst>
@@ -16499,14 +16832,14 @@
       </p:sp>
       <p:sp>
         <p:nvSpPr>
-          <p:cNvPr id="17" name="Rectangle 16"/>
+          <p:cNvPr id="18" name="Rectangle 17"/>
           <p:cNvSpPr/>
           <p:nvPr/>
         </p:nvSpPr>
         <p:spPr>
           <a:xfrm>
             <a:off x="4453128" y="1618488"/>
-            <a:ext cx="50292" cy="2377440"/>
+            <a:ext cx="50292" cy="2926080"/>
           </a:xfrm>
           <a:prstGeom prst="rect">
             <a:avLst/>
@@ -16543,7 +16876,7 @@
       </p:sp>
       <p:sp>
         <p:nvSpPr>
-          <p:cNvPr id="18" name="TextBox 17"/>
+          <p:cNvPr id="19" name="TextBox 18"/>
           <p:cNvSpPr txBox="1"/>
           <p:nvPr/>
         </p:nvSpPr>
@@ -16582,7 +16915,7 @@
       </p:sp>
       <p:sp>
         <p:nvSpPr>
-          <p:cNvPr id="19" name="TextBox 18"/>
+          <p:cNvPr id="20" name="TextBox 19"/>
           <p:cNvSpPr txBox="1"/>
           <p:nvPr/>
         </p:nvSpPr>
@@ -16614,14 +16947,14 @@
                 </a:solidFill>
                 <a:latin typeface="Segoe UI"/>
               </a:rPr>
-              <a:t>Elle ne m'a pas fourni un</a:t>
-            </a:r>
-          </a:p>
-        </p:txBody>
-      </p:sp>
-      <p:sp>
-        <p:nvSpPr>
-          <p:cNvPr id="20" name="TextBox 19"/>
+              <a:t>Mes missions touchent à</a:t>
+            </a:r>
+          </a:p>
+        </p:txBody>
+      </p:sp>
+      <p:sp>
+        <p:nvSpPr>
+          <p:cNvPr id="21" name="TextBox 20"/>
           <p:cNvSpPr txBox="1"/>
           <p:nvPr/>
         </p:nvSpPr>
@@ -16653,14 +16986,14 @@
                 </a:solidFill>
                 <a:latin typeface="Segoe UI"/>
               </a:rPr>
-              <a:t>projet DevOps couvrant les</a:t>
-            </a:r>
-          </a:p>
-        </p:txBody>
-      </p:sp>
-      <p:sp>
-        <p:nvSpPr>
-          <p:cNvPr id="21" name="TextBox 20"/>
+              <a:t>plusieurs de ces domaines,</a:t>
+            </a:r>
+          </a:p>
+        </p:txBody>
+      </p:sp>
+      <p:sp>
+        <p:nvSpPr>
+          <p:cNvPr id="22" name="TextBox 21"/>
           <p:cNvSpPr txBox="1"/>
           <p:nvPr/>
         </p:nvSpPr>
@@ -16692,14 +17025,14 @@
                 </a:solidFill>
                 <a:latin typeface="Segoe UI"/>
               </a:rPr>
-              <a:t>attendus certificatifs.</a:t>
-            </a:r>
-          </a:p>
-        </p:txBody>
-      </p:sp>
-      <p:sp>
-        <p:nvSpPr>
-          <p:cNvPr id="22" name="TextBox 21"/>
+              <a:t>mais aucune ne réunit les</a:t>
+            </a:r>
+          </a:p>
+        </p:txBody>
+      </p:sp>
+      <p:sp>
+        <p:nvSpPr>
+          <p:cNvPr id="23" name="TextBox 22"/>
           <p:cNvSpPr txBox="1"/>
           <p:nvPr/>
         </p:nvSpPr>
@@ -16731,14 +17064,14 @@
                 </a:solidFill>
                 <a:latin typeface="Segoe UI"/>
               </a:rPr>
-              <a:t/>
-            </a:r>
-          </a:p>
-        </p:txBody>
-      </p:sp>
-      <p:sp>
-        <p:nvSpPr>
-          <p:cNvPr id="23" name="TextBox 22"/>
+              <a:t>trois compétences du titre —</a:t>
+            </a:r>
+          </a:p>
+        </p:txBody>
+      </p:sp>
+      <p:sp>
+        <p:nvSpPr>
+          <p:cNvPr id="24" name="TextBox 23"/>
           <p:cNvSpPr txBox="1"/>
           <p:nvPr/>
         </p:nvSpPr>
@@ -16770,14 +17103,14 @@
                 </a:solidFill>
                 <a:latin typeface="Segoe UI"/>
               </a:rPr>
-              <a:t>J'ai donc conçu OpsForge,</a:t>
-            </a:r>
-          </a:p>
-        </p:txBody>
-      </p:sp>
-      <p:sp>
-        <p:nvSpPr>
-          <p:cNvPr id="24" name="TextBox 23"/>
+              <a:t>aucune ne porte sur les</a:t>
+            </a:r>
+          </a:p>
+        </p:txBody>
+      </p:sp>
+      <p:sp>
+        <p:nvSpPr>
+          <p:cNvPr id="25" name="TextBox 24"/>
           <p:cNvSpPr txBox="1"/>
           <p:nvPr/>
         </p:nvSpPr>
@@ -16809,14 +17142,92 @@
                 </a:solidFill>
                 <a:latin typeface="Segoe UI"/>
               </a:rPr>
-              <a:t>de juin à août 2026.</a:t>
-            </a:r>
-          </a:p>
-        </p:txBody>
-      </p:sp>
-      <p:sp>
-        <p:nvSpPr>
-          <p:cNvPr id="25" name="Rounded Rectangle 24"/>
+              <a:t>containers.</a:t>
+            </a:r>
+          </a:p>
+        </p:txBody>
+      </p:sp>
+      <p:sp>
+        <p:nvSpPr>
+          <p:cNvPr id="26" name="TextBox 25"/>
+          <p:cNvSpPr txBox="1"/>
+          <p:nvPr/>
+        </p:nvSpPr>
+        <p:spPr>
+          <a:xfrm>
+            <a:off x="4709160" y="3813047"/>
+            <a:ext cx="3108960" cy="274320"/>
+          </a:xfrm>
+          <a:prstGeom prst="rect">
+            <a:avLst/>
+          </a:prstGeom>
+          <a:noFill/>
+        </p:spPr>
+        <p:txBody>
+          <a:bodyPr wrap="square" lIns="0" rIns="0" tIns="0" bIns="0" anchor="t">
+            <a:spAutoFit/>
+          </a:bodyPr>
+          <a:lstStyle/>
+          <a:p>
+            <a:pPr algn="l">
+              <a:lnSpc>
+                <a:spcPct val="95000"/>
+              </a:lnSpc>
+            </a:pPr>
+            <a:r>
+              <a:rPr sz="1350" b="0" i="0">
+                <a:solidFill>
+                  <a:srgbClr val="1E293B"/>
+                </a:solidFill>
+                <a:latin typeface="Segoe UI"/>
+              </a:rPr>
+              <a:t/>
+            </a:r>
+          </a:p>
+        </p:txBody>
+      </p:sp>
+      <p:sp>
+        <p:nvSpPr>
+          <p:cNvPr id="27" name="TextBox 26"/>
+          <p:cNvSpPr txBox="1"/>
+          <p:nvPr/>
+        </p:nvSpPr>
+        <p:spPr>
+          <a:xfrm>
+            <a:off x="4709160" y="4087367"/>
+            <a:ext cx="3108960" cy="274320"/>
+          </a:xfrm>
+          <a:prstGeom prst="rect">
+            <a:avLst/>
+          </a:prstGeom>
+          <a:noFill/>
+        </p:spPr>
+        <p:txBody>
+          <a:bodyPr wrap="square" lIns="0" rIns="0" tIns="0" bIns="0" anchor="t">
+            <a:spAutoFit/>
+          </a:bodyPr>
+          <a:lstStyle/>
+          <a:p>
+            <a:pPr algn="l">
+              <a:lnSpc>
+                <a:spcPct val="95000"/>
+              </a:lnSpc>
+            </a:pPr>
+            <a:r>
+              <a:rPr sz="1350" b="0" i="0">
+                <a:solidFill>
+                  <a:srgbClr val="1E293B"/>
+                </a:solidFill>
+                <a:latin typeface="Segoe UI"/>
+              </a:rPr>
+              <a:t>D'où OpsForge, juin-août 2026.</a:t>
+            </a:r>
+          </a:p>
+        </p:txBody>
+      </p:sp>
+      <p:sp>
+        <p:nvSpPr>
+          <p:cNvPr id="28" name="Rounded Rectangle 27"/>
           <p:cNvSpPr/>
           <p:nvPr/>
         </p:nvSpPr>
@@ -16864,7 +17275,7 @@
       </p:sp>
       <p:sp>
         <p:nvSpPr>
-          <p:cNvPr id="26" name="Rectangle 25"/>
+          <p:cNvPr id="29" name="Rectangle 28"/>
           <p:cNvSpPr/>
           <p:nvPr/>
         </p:nvSpPr>
@@ -16908,7 +17319,7 @@
       </p:sp>
       <p:sp>
         <p:nvSpPr>
-          <p:cNvPr id="27" name="TextBox 26"/>
+          <p:cNvPr id="30" name="TextBox 29"/>
           <p:cNvSpPr txBox="1"/>
           <p:nvPr/>
         </p:nvSpPr>
@@ -16947,7 +17358,7 @@
       </p:sp>
       <p:sp>
         <p:nvSpPr>
-          <p:cNvPr id="28" name="TextBox 27"/>
+          <p:cNvPr id="31" name="TextBox 30"/>
           <p:cNvSpPr txBox="1"/>
           <p:nvPr/>
         </p:nvSpPr>
@@ -16986,7 +17397,7 @@
       </p:sp>
       <p:sp>
         <p:nvSpPr>
-          <p:cNvPr id="29" name="TextBox 28"/>
+          <p:cNvPr id="32" name="TextBox 31"/>
           <p:cNvSpPr txBox="1"/>
           <p:nvPr/>
         </p:nvSpPr>
@@ -17025,7 +17436,7 @@
       </p:sp>
       <p:sp>
         <p:nvSpPr>
-          <p:cNvPr id="30" name="TextBox 29"/>
+          <p:cNvPr id="33" name="TextBox 32"/>
           <p:cNvSpPr txBox="1"/>
           <p:nvPr/>
         </p:nvSpPr>
@@ -17064,7 +17475,7 @@
       </p:sp>
       <p:sp>
         <p:nvSpPr>
-          <p:cNvPr id="31" name="TextBox 30"/>
+          <p:cNvPr id="34" name="TextBox 33"/>
           <p:cNvSpPr txBox="1"/>
           <p:nvPr/>
         </p:nvSpPr>
@@ -17103,7 +17514,7 @@
       </p:sp>
       <p:sp>
         <p:nvSpPr>
-          <p:cNvPr id="32" name="TextBox 31"/>
+          <p:cNvPr id="35" name="TextBox 34"/>
           <p:cNvSpPr txBox="1"/>
           <p:nvPr/>
         </p:nvSpPr>
@@ -17142,13 +17553,13 @@
       </p:sp>
       <p:sp>
         <p:nvSpPr>
-          <p:cNvPr id="33" name="Rounded Rectangle 32"/>
+          <p:cNvPr id="36" name="Rounded Rectangle 35"/>
           <p:cNvSpPr/>
           <p:nvPr/>
         </p:nvSpPr>
         <p:spPr>
           <a:xfrm>
-            <a:off x="658368" y="4315968"/>
+            <a:off x="658368" y="4590288"/>
             <a:ext cx="10874959" cy="658368"/>
           </a:xfrm>
           <a:prstGeom prst="roundRect">
@@ -17188,13 +17599,13 @@
       </p:sp>
       <p:sp>
         <p:nvSpPr>
-          <p:cNvPr id="34" name="TextBox 33"/>
-          <p:cNvSpPr txBox="1"/>
-          <p:nvPr/>
-        </p:nvSpPr>
-        <p:spPr>
-          <a:xfrm>
-            <a:off x="932688" y="4471416"/>
+          <p:cNvPr id="37" name="TextBox 36"/>
+          <p:cNvSpPr txBox="1"/>
+          <p:nvPr/>
+        </p:nvSpPr>
+        <p:spPr>
+          <a:xfrm>
+            <a:off x="932688" y="4745736"/>
             <a:ext cx="10326319" cy="457200"/>
           </a:xfrm>
           <a:prstGeom prst="rect">
@@ -17394,7 +17805,7 @@
                 </a:solidFill>
                 <a:latin typeface="Segoe UI Semibold"/>
               </a:rPr>
-              <a:t>Questions probables — le périmètre</a:t>
+              <a:t>Mon dossier professionnel et OpsForge se répondent</a:t>
             </a:r>
           </a:p>
         </p:txBody>
@@ -17445,27 +17856,23 @@
       </p:sp>
       <p:sp>
         <p:nvSpPr>
-          <p:cNvPr id="7" name="Rounded Rectangle 6"/>
+          <p:cNvPr id="7" name="Rectangle 6"/>
           <p:cNvSpPr/>
           <p:nvPr/>
         </p:nvSpPr>
         <p:spPr>
           <a:xfrm>
-            <a:off x="658368" y="1618488"/>
-            <a:ext cx="10874959" cy="896112"/>
-          </a:xfrm>
-          <a:prstGeom prst="roundRect">
-            <a:avLst>
-              <a:gd name="adj" fmla="val 6000"/>
-            </a:avLst>
+            <a:off x="658368" y="1572768"/>
+            <a:ext cx="10874959" cy="384048"/>
+          </a:xfrm>
+          <a:prstGeom prst="rect">
+            <a:avLst/>
           </a:prstGeom>
           <a:solidFill>
-            <a:srgbClr val="FFFFFF"/>
+            <a:srgbClr val="0F766E"/>
           </a:solidFill>
-          <a:ln w="15875">
-            <a:solidFill>
-              <a:srgbClr val="CBD5E1"/>
-            </a:solidFill>
+          <a:ln>
+            <a:noFill/>
           </a:ln>
           <a:effectLst/>
         </p:spPr>
@@ -17493,20 +17900,137 @@
       </p:sp>
       <p:sp>
         <p:nvSpPr>
-          <p:cNvPr id="8" name="Rectangle 7"/>
+          <p:cNvPr id="8" name="TextBox 7"/>
+          <p:cNvSpPr txBox="1"/>
+          <p:nvPr/>
+        </p:nvSpPr>
+        <p:spPr>
+          <a:xfrm>
+            <a:off x="886968" y="1655064"/>
+            <a:ext cx="2743200" cy="274320"/>
+          </a:xfrm>
+          <a:prstGeom prst="rect">
+            <a:avLst/>
+          </a:prstGeom>
+          <a:noFill/>
+        </p:spPr>
+        <p:txBody>
+          <a:bodyPr wrap="square" lIns="0" rIns="0" tIns="0" bIns="0" anchor="t">
+            <a:spAutoFit/>
+          </a:bodyPr>
+          <a:lstStyle/>
+          <a:p>
+            <a:pPr algn="l">
+              <a:lnSpc>
+                <a:spcPct val="100000"/>
+              </a:lnSpc>
+            </a:pPr>
+            <a:r>
+              <a:rPr sz="1250" b="1" i="0">
+                <a:solidFill>
+                  <a:srgbClr val="FFFFFF"/>
+                </a:solidFill>
+                <a:latin typeface="Segoe UI Semibold"/>
+              </a:rPr>
+              <a:t>COMPÉTENCE OBLIGATOIRE</a:t>
+            </a:r>
+          </a:p>
+        </p:txBody>
+      </p:sp>
+      <p:sp>
+        <p:nvSpPr>
+          <p:cNvPr id="9" name="TextBox 8"/>
+          <p:cNvSpPr txBox="1"/>
+          <p:nvPr/>
+        </p:nvSpPr>
+        <p:spPr>
+          <a:xfrm>
+            <a:off x="3858768" y="1655064"/>
+            <a:ext cx="3931920" cy="274320"/>
+          </a:xfrm>
+          <a:prstGeom prst="rect">
+            <a:avLst/>
+          </a:prstGeom>
+          <a:noFill/>
+        </p:spPr>
+        <p:txBody>
+          <a:bodyPr wrap="square" lIns="0" rIns="0" tIns="0" bIns="0" anchor="t">
+            <a:spAutoFit/>
+          </a:bodyPr>
+          <a:lstStyle/>
+          <a:p>
+            <a:pPr algn="l">
+              <a:lnSpc>
+                <a:spcPct val="100000"/>
+              </a:lnSpc>
+            </a:pPr>
+            <a:r>
+              <a:rPr sz="1250" b="1" i="0">
+                <a:solidFill>
+                  <a:srgbClr val="FFFFFF"/>
+                </a:solidFill>
+                <a:latin typeface="Segoe UI Semibold"/>
+              </a:rPr>
+              <a:t>DANS MON EXPÉRIENCE PROFESSIONNELLE</a:t>
+            </a:r>
+          </a:p>
+        </p:txBody>
+      </p:sp>
+      <p:sp>
+        <p:nvSpPr>
+          <p:cNvPr id="10" name="TextBox 9"/>
+          <p:cNvSpPr txBox="1"/>
+          <p:nvPr/>
+        </p:nvSpPr>
+        <p:spPr>
+          <a:xfrm>
+            <a:off x="8065008" y="1655064"/>
+            <a:ext cx="3657600" cy="274320"/>
+          </a:xfrm>
+          <a:prstGeom prst="rect">
+            <a:avLst/>
+          </a:prstGeom>
+          <a:noFill/>
+        </p:spPr>
+        <p:txBody>
+          <a:bodyPr wrap="square" lIns="0" rIns="0" tIns="0" bIns="0" anchor="t">
+            <a:spAutoFit/>
+          </a:bodyPr>
+          <a:lstStyle/>
+          <a:p>
+            <a:pPr algn="l">
+              <a:lnSpc>
+                <a:spcPct val="100000"/>
+              </a:lnSpc>
+            </a:pPr>
+            <a:r>
+              <a:rPr sz="1250" b="1" i="0">
+                <a:solidFill>
+                  <a:srgbClr val="FFFFFF"/>
+                </a:solidFill>
+                <a:latin typeface="Segoe UI Semibold"/>
+              </a:rPr>
+              <a:t>DANS OPSFORGE</a:t>
+            </a:r>
+          </a:p>
+        </p:txBody>
+      </p:sp>
+      <p:sp>
+        <p:nvSpPr>
+          <p:cNvPr id="11" name="Rectangle 10"/>
           <p:cNvSpPr/>
           <p:nvPr/>
         </p:nvSpPr>
         <p:spPr>
           <a:xfrm>
-            <a:off x="658368" y="1618488"/>
-            <a:ext cx="50292" cy="896112"/>
+            <a:off x="658368" y="1956816"/>
+            <a:ext cx="10874959" cy="1097280"/>
           </a:xfrm>
           <a:prstGeom prst="rect">
             <a:avLst/>
           </a:prstGeom>
           <a:solidFill>
-            <a:srgbClr val="B45309"/>
+            <a:srgbClr val="FFFFFF"/>
           </a:solidFill>
           <a:ln>
             <a:noFill/>
@@ -17537,53 +18061,14 @@
       </p:sp>
       <p:sp>
         <p:nvSpPr>
-          <p:cNvPr id="9" name="TextBox 8"/>
-          <p:cNvSpPr txBox="1"/>
-          <p:nvPr/>
-        </p:nvSpPr>
-        <p:spPr>
-          <a:xfrm>
-            <a:off x="914400" y="1737360"/>
-            <a:ext cx="10326319" cy="274320"/>
-          </a:xfrm>
-          <a:prstGeom prst="rect">
-            <a:avLst/>
-          </a:prstGeom>
-          <a:noFill/>
-        </p:spPr>
-        <p:txBody>
-          <a:bodyPr wrap="square" lIns="0" rIns="0" tIns="0" bIns="0" anchor="t">
-            <a:spAutoFit/>
-          </a:bodyPr>
-          <a:lstStyle/>
-          <a:p>
-            <a:pPr algn="l">
-              <a:lnSpc>
-                <a:spcPct val="100000"/>
-              </a:lnSpc>
-            </a:pPr>
-            <a:r>
-              <a:rPr sz="1450" b="1" i="0">
-                <a:solidFill>
-                  <a:srgbClr val="B45309"/>
-                </a:solidFill>
-                <a:latin typeface="Segoe UI Semibold"/>
-              </a:rPr>
-              <a:t>« Pourquoi pas de cloud ? »</a:t>
-            </a:r>
-          </a:p>
-        </p:txBody>
-      </p:sp>
-      <p:sp>
-        <p:nvSpPr>
-          <p:cNvPr id="10" name="TextBox 9"/>
-          <p:cNvSpPr txBox="1"/>
-          <p:nvPr/>
-        </p:nvSpPr>
-        <p:spPr>
-          <a:xfrm>
-            <a:off x="914400" y="2029968"/>
-            <a:ext cx="10326319" cy="457200"/>
+          <p:cNvPr id="12" name="TextBox 11"/>
+          <p:cNvSpPr txBox="1"/>
+          <p:nvPr/>
+        </p:nvSpPr>
+        <p:spPr>
+          <a:xfrm>
+            <a:off x="886968" y="2084832"/>
+            <a:ext cx="2834640" cy="914400"/>
           </a:xfrm>
           <a:prstGeom prst="rect">
             <a:avLst/>
@@ -17602,40 +18087,121 @@
               </a:lnSpc>
             </a:pPr>
             <a:r>
-              <a:rPr sz="1350" b="0" i="0">
+              <a:rPr sz="1250" b="1" i="0">
                 <a:solidFill>
                   <a:srgbClr val="1E293B"/>
                 </a:solidFill>
                 <a:latin typeface="Segoe UI"/>
               </a:rPr>
-              <a:t>Budget zéro cloud assumé, et le référentiel n'exige pas le cloud pour les trois compétences obligatoires. La mise en production cloud n'est pas revendiquée.</a:t>
-            </a:r>
-          </a:p>
-        </p:txBody>
-      </p:sp>
-      <p:sp>
-        <p:nvSpPr>
-          <p:cNvPr id="11" name="Rounded Rectangle 10"/>
+              <a:t>CP n° 2
+Automatiser le déploiement
+d'une infrastructure</a:t>
+            </a:r>
+          </a:p>
+        </p:txBody>
+      </p:sp>
+      <p:sp>
+        <p:nvSpPr>
+          <p:cNvPr id="13" name="TextBox 12"/>
+          <p:cNvSpPr txBox="1"/>
+          <p:nvPr/>
+        </p:nvSpPr>
+        <p:spPr>
+          <a:xfrm>
+            <a:off x="3858768" y="2084832"/>
+            <a:ext cx="4023360" cy="914400"/>
+          </a:xfrm>
+          <a:prstGeom prst="rect">
+            <a:avLst/>
+          </a:prstGeom>
+          <a:noFill/>
+        </p:spPr>
+        <p:txBody>
+          <a:bodyPr wrap="square" lIns="0" rIns="0" tIns="0" bIns="0" anchor="t">
+            <a:spAutoFit/>
+          </a:bodyPr>
+          <a:lstStyle/>
+          <a:p>
+            <a:pPr algn="l">
+              <a:lnSpc>
+                <a:spcPct val="95000"/>
+              </a:lnSpc>
+            </a:pPr>
+            <a:r>
+              <a:rPr sz="1250" b="0" i="0">
+                <a:solidFill>
+                  <a:srgbClr val="64748B"/>
+                </a:solidFill>
+                <a:latin typeface="Segoe UI"/>
+              </a:rPr>
+              <a:t>Automatisation PowerShell de
+provisionnement (comptes, dossiers,
+droits) — pas du déploiement
+d'infrastructure</a:t>
+            </a:r>
+          </a:p>
+        </p:txBody>
+      </p:sp>
+      <p:sp>
+        <p:nvSpPr>
+          <p:cNvPr id="14" name="TextBox 13"/>
+          <p:cNvSpPr txBox="1"/>
+          <p:nvPr/>
+        </p:nvSpPr>
+        <p:spPr>
+          <a:xfrm>
+            <a:off x="8065008" y="2084832"/>
+            <a:ext cx="3749039" cy="914400"/>
+          </a:xfrm>
+          <a:prstGeom prst="rect">
+            <a:avLst/>
+          </a:prstGeom>
+          <a:noFill/>
+        </p:spPr>
+        <p:txBody>
+          <a:bodyPr wrap="square" lIns="0" rIns="0" tIns="0" bIns="0" anchor="t">
+            <a:spAutoFit/>
+          </a:bodyPr>
+          <a:lstStyle/>
+          <a:p>
+            <a:pPr algn="l">
+              <a:lnSpc>
+                <a:spcPct val="95000"/>
+              </a:lnSpc>
+            </a:pPr>
+            <a:r>
+              <a:rPr sz="1250" b="0" i="0">
+                <a:solidFill>
+                  <a:srgbClr val="115E59"/>
+                </a:solidFill>
+                <a:latin typeface="Segoe UI"/>
+              </a:rPr>
+              <a:t>Playbook Ansible : l'infrastructure
+complète en une commande
+idempotente et auto-vérifiée</a:t>
+            </a:r>
+          </a:p>
+        </p:txBody>
+      </p:sp>
+      <p:sp>
+        <p:nvSpPr>
+          <p:cNvPr id="15" name="Rectangle 14"/>
           <p:cNvSpPr/>
           <p:nvPr/>
         </p:nvSpPr>
         <p:spPr>
           <a:xfrm>
-            <a:off x="658368" y="2606040"/>
-            <a:ext cx="10874959" cy="896112"/>
-          </a:xfrm>
-          <a:prstGeom prst="roundRect">
-            <a:avLst>
-              <a:gd name="adj" fmla="val 6000"/>
-            </a:avLst>
+            <a:off x="658368" y="3054096"/>
+            <a:ext cx="10874959" cy="1097280"/>
+          </a:xfrm>
+          <a:prstGeom prst="rect">
+            <a:avLst/>
           </a:prstGeom>
           <a:solidFill>
-            <a:srgbClr val="FFFFFF"/>
+            <a:srgbClr val="F1F5F9"/>
           </a:solidFill>
-          <a:ln w="15875">
-            <a:solidFill>
-              <a:srgbClr val="CBD5E1"/>
-            </a:solidFill>
+          <a:ln>
+            <a:noFill/>
           </a:ln>
           <a:effectLst/>
         </p:spPr>
@@ -17663,20 +18229,142 @@
       </p:sp>
       <p:sp>
         <p:nvSpPr>
-          <p:cNvPr id="12" name="Rectangle 11"/>
+          <p:cNvPr id="16" name="TextBox 15"/>
+          <p:cNvSpPr txBox="1"/>
+          <p:nvPr/>
+        </p:nvSpPr>
+        <p:spPr>
+          <a:xfrm>
+            <a:off x="886968" y="3182112"/>
+            <a:ext cx="2834640" cy="914400"/>
+          </a:xfrm>
+          <a:prstGeom prst="rect">
+            <a:avLst/>
+          </a:prstGeom>
+          <a:noFill/>
+        </p:spPr>
+        <p:txBody>
+          <a:bodyPr wrap="square" lIns="0" rIns="0" tIns="0" bIns="0" anchor="t">
+            <a:spAutoFit/>
+          </a:bodyPr>
+          <a:lstStyle/>
+          <a:p>
+            <a:pPr algn="l">
+              <a:lnSpc>
+                <a:spcPct val="95000"/>
+              </a:lnSpc>
+            </a:pPr>
+            <a:r>
+              <a:rPr sz="1250" b="1" i="0">
+                <a:solidFill>
+                  <a:srgbClr val="1E293B"/>
+                </a:solidFill>
+                <a:latin typeface="Segoe UI"/>
+              </a:rPr>
+              <a:t>CP n° 7
+Gérer des containers</a:t>
+            </a:r>
+          </a:p>
+        </p:txBody>
+      </p:sp>
+      <p:sp>
+        <p:nvSpPr>
+          <p:cNvPr id="17" name="TextBox 16"/>
+          <p:cNvSpPr txBox="1"/>
+          <p:nvPr/>
+        </p:nvSpPr>
+        <p:spPr>
+          <a:xfrm>
+            <a:off x="3858768" y="3182112"/>
+            <a:ext cx="4023360" cy="914400"/>
+          </a:xfrm>
+          <a:prstGeom prst="rect">
+            <a:avLst/>
+          </a:prstGeom>
+          <a:noFill/>
+        </p:spPr>
+        <p:txBody>
+          <a:bodyPr wrap="square" lIns="0" rIns="0" tIns="0" bIns="0" anchor="t">
+            <a:spAutoFit/>
+          </a:bodyPr>
+          <a:lstStyle/>
+          <a:p>
+            <a:pPr algn="l">
+              <a:lnSpc>
+                <a:spcPct val="95000"/>
+              </a:lnSpc>
+            </a:pPr>
+            <a:r>
+              <a:rPr sz="1250" b="0" i="0">
+                <a:solidFill>
+                  <a:srgbClr val="64748B"/>
+                </a:solidFill>
+                <a:latin typeface="Segoe UI"/>
+              </a:rPr>
+              <a:t>Aucun exemple : rien dans mon
+parcours professionnel ne porte
+sur des containers</a:t>
+            </a:r>
+          </a:p>
+        </p:txBody>
+      </p:sp>
+      <p:sp>
+        <p:nvSpPr>
+          <p:cNvPr id="18" name="TextBox 17"/>
+          <p:cNvSpPr txBox="1"/>
+          <p:nvPr/>
+        </p:nvSpPr>
+        <p:spPr>
+          <a:xfrm>
+            <a:off x="8065008" y="3182112"/>
+            <a:ext cx="3749039" cy="914400"/>
+          </a:xfrm>
+          <a:prstGeom prst="rect">
+            <a:avLst/>
+          </a:prstGeom>
+          <a:noFill/>
+        </p:spPr>
+        <p:txBody>
+          <a:bodyPr wrap="square" lIns="0" rIns="0" tIns="0" bIns="0" anchor="t">
+            <a:spAutoFit/>
+          </a:bodyPr>
+          <a:lstStyle/>
+          <a:p>
+            <a:pPr algn="l">
+              <a:lnSpc>
+                <a:spcPct val="95000"/>
+              </a:lnSpc>
+            </a:pPr>
+            <a:r>
+              <a:rPr sz="1250" b="0" i="0">
+                <a:solidFill>
+                  <a:srgbClr val="115E59"/>
+                </a:solidFill>
+                <a:latin typeface="Segoe UI"/>
+              </a:rPr>
+              <a:t>Image durcie, Compose puis
+Kubernetes, persistance du
+stockage prouvée</a:t>
+            </a:r>
+          </a:p>
+        </p:txBody>
+      </p:sp>
+      <p:sp>
+        <p:nvSpPr>
+          <p:cNvPr id="19" name="Rectangle 18"/>
           <p:cNvSpPr/>
           <p:nvPr/>
         </p:nvSpPr>
         <p:spPr>
           <a:xfrm>
-            <a:off x="658368" y="2606040"/>
-            <a:ext cx="50292" cy="896112"/>
+            <a:off x="658368" y="4151376"/>
+            <a:ext cx="10874959" cy="1097280"/>
           </a:xfrm>
           <a:prstGeom prst="rect">
             <a:avLst/>
           </a:prstGeom>
           <a:solidFill>
-            <a:srgbClr val="B45309"/>
+            <a:srgbClr val="FFFFFF"/>
           </a:solidFill>
           <a:ln>
             <a:noFill/>
@@ -17707,418 +18395,163 @@
       </p:sp>
       <p:sp>
         <p:nvSpPr>
-          <p:cNvPr id="13" name="TextBox 12"/>
-          <p:cNvSpPr txBox="1"/>
-          <p:nvPr/>
-        </p:nvSpPr>
-        <p:spPr>
-          <a:xfrm>
-            <a:off x="914400" y="2724912"/>
-            <a:ext cx="10326319" cy="274320"/>
-          </a:xfrm>
-          <a:prstGeom prst="rect">
-            <a:avLst/>
-          </a:prstGeom>
-          <a:noFill/>
-        </p:spPr>
-        <p:txBody>
-          <a:bodyPr wrap="square" lIns="0" rIns="0" tIns="0" bIns="0" anchor="t">
-            <a:spAutoFit/>
-          </a:bodyPr>
-          <a:lstStyle/>
-          <a:p>
-            <a:pPr algn="l">
+          <p:cNvPr id="20" name="TextBox 19"/>
+          <p:cNvSpPr txBox="1"/>
+          <p:nvPr/>
+        </p:nvSpPr>
+        <p:spPr>
+          <a:xfrm>
+            <a:off x="886968" y="4279392"/>
+            <a:ext cx="2834640" cy="914400"/>
+          </a:xfrm>
+          <a:prstGeom prst="rect">
+            <a:avLst/>
+          </a:prstGeom>
+          <a:noFill/>
+        </p:spPr>
+        <p:txBody>
+          <a:bodyPr wrap="square" lIns="0" rIns="0" tIns="0" bIns="0" anchor="t">
+            <a:spAutoFit/>
+          </a:bodyPr>
+          <a:lstStyle/>
+          <a:p>
+            <a:pPr algn="l">
+              <a:lnSpc>
+                <a:spcPct val="95000"/>
+              </a:lnSpc>
+            </a:pPr>
+            <a:r>
+              <a:rPr sz="1250" b="1" i="0">
+                <a:solidFill>
+                  <a:srgbClr val="1E293B"/>
+                </a:solidFill>
+                <a:latin typeface="Segoe UI"/>
+              </a:rPr>
+              <a:t>CP n° 10
+Exploiter une solution
+de supervision</a:t>
+            </a:r>
+          </a:p>
+        </p:txBody>
+      </p:sp>
+      <p:sp>
+        <p:nvSpPr>
+          <p:cNvPr id="21" name="TextBox 20"/>
+          <p:cNvSpPr txBox="1"/>
+          <p:nvPr/>
+        </p:nvSpPr>
+        <p:spPr>
+          <a:xfrm>
+            <a:off x="3858768" y="4279392"/>
+            <a:ext cx="4023360" cy="914400"/>
+          </a:xfrm>
+          <a:prstGeom prst="rect">
+            <a:avLst/>
+          </a:prstGeom>
+          <a:noFill/>
+        </p:spPr>
+        <p:txBody>
+          <a:bodyPr wrap="square" lIns="0" rIns="0" tIns="0" bIns="0" anchor="t">
+            <a:spAutoFit/>
+          </a:bodyPr>
+          <a:lstStyle/>
+          <a:p>
+            <a:pPr algn="l">
+              <a:lnSpc>
+                <a:spcPct val="95000"/>
+              </a:lnSpc>
+            </a:pPr>
+            <a:r>
+              <a:rPr sz="1250" b="0" i="0">
+                <a:solidFill>
+                  <a:srgbClr val="64748B"/>
+                </a:solidFill>
+                <a:latin typeface="Segoe UI"/>
+              </a:rPr>
+              <a:t>Supervision multi-clients réelle,
+en équipe — et un incident où le
+vert de la console cachait une
+panne bien réelle</a:t>
+            </a:r>
+          </a:p>
+        </p:txBody>
+      </p:sp>
+      <p:sp>
+        <p:nvSpPr>
+          <p:cNvPr id="22" name="TextBox 21"/>
+          <p:cNvSpPr txBox="1"/>
+          <p:nvPr/>
+        </p:nvSpPr>
+        <p:spPr>
+          <a:xfrm>
+            <a:off x="8065008" y="4279392"/>
+            <a:ext cx="3749039" cy="914400"/>
+          </a:xfrm>
+          <a:prstGeom prst="rect">
+            <a:avLst/>
+          </a:prstGeom>
+          <a:noFill/>
+        </p:spPr>
+        <p:txBody>
+          <a:bodyPr wrap="square" lIns="0" rIns="0" tIns="0" bIns="0" anchor="t">
+            <a:spAutoFit/>
+          </a:bodyPr>
+          <a:lstStyle/>
+          <a:p>
+            <a:pPr algn="l">
+              <a:lnSpc>
+                <a:spcPct val="95000"/>
+              </a:lnSpc>
+            </a:pPr>
+            <a:r>
+              <a:rPr sz="1250" b="0" i="0">
+                <a:solidFill>
+                  <a:srgbClr val="115E59"/>
+                </a:solidFill>
+                <a:latin typeface="Segoe UI"/>
+              </a:rPr>
+              <a:t>Chaîne Prometheus/Grafana et
+une alerte réellement déclenchée
+puis résolue</a:t>
+            </a:r>
+          </a:p>
+        </p:txBody>
+      </p:sp>
+      <p:sp>
+        <p:nvSpPr>
+          <p:cNvPr id="23" name="TextBox 22"/>
+          <p:cNvSpPr txBox="1"/>
+          <p:nvPr/>
+        </p:nvSpPr>
+        <p:spPr>
+          <a:xfrm>
+            <a:off x="658368" y="5522976"/>
+            <a:ext cx="10874959" cy="457200"/>
+          </a:xfrm>
+          <a:prstGeom prst="rect">
+            <a:avLst/>
+          </a:prstGeom>
+          <a:noFill/>
+        </p:spPr>
+        <p:txBody>
+          <a:bodyPr wrap="square" lIns="0" rIns="0" tIns="0" bIns="0" anchor="t">
+            <a:spAutoFit/>
+          </a:bodyPr>
+          <a:lstStyle/>
+          <a:p>
+            <a:pPr algn="ctr">
               <a:lnSpc>
                 <a:spcPct val="100000"/>
               </a:lnSpc>
             </a:pPr>
             <a:r>
-              <a:rPr sz="1450" b="1" i="0">
-                <a:solidFill>
-                  <a:srgbClr val="B45309"/>
-                </a:solidFill>
-                <a:latin typeface="Segoe UI Semibold"/>
-              </a:rPr>
-              <a:t>« Votre stockage n'est pas distant. »</a:t>
-            </a:r>
-          </a:p>
-        </p:txBody>
-      </p:sp>
-      <p:sp>
-        <p:nvSpPr>
-          <p:cNvPr id="14" name="TextBox 13"/>
-          <p:cNvSpPr txBox="1"/>
-          <p:nvPr/>
-        </p:nvSpPr>
-        <p:spPr>
-          <a:xfrm>
-            <a:off x="914400" y="3017520"/>
-            <a:ext cx="10326319" cy="457200"/>
-          </a:xfrm>
-          <a:prstGeom prst="rect">
-            <a:avLst/>
-          </a:prstGeom>
-          <a:noFill/>
-        </p:spPr>
-        <p:txBody>
-          <a:bodyPr wrap="square" lIns="0" rIns="0" tIns="0" bIns="0" anchor="t">
-            <a:spAutoFit/>
-          </a:bodyPr>
-          <a:lstStyle/>
-          <a:p>
-            <a:pPr algn="l">
-              <a:lnSpc>
-                <a:spcPct val="95000"/>
-              </a:lnSpc>
-            </a:pPr>
-            <a:r>
-              <a:rPr sz="1350" b="0" i="0">
-                <a:solidFill>
-                  <a:srgbClr val="1E293B"/>
+              <a:rPr sz="1500" b="1" i="0">
+                <a:solidFill>
+                  <a:srgbClr val="115E59"/>
                 </a:solidFill>
                 <a:latin typeface="Segoe UI"/>
               </a:rPr>
-              <a:t>Exact. Le conteneur est connecté à un stockage externalisé de son cycle de vie, porté par l'hôte. En k3d, local-path reste local au nœud. Une StorageClass NFS ou CSI la remplacerait sans toucher au manifest.</a:t>
-            </a:r>
-          </a:p>
-        </p:txBody>
-      </p:sp>
-      <p:sp>
-        <p:nvSpPr>
-          <p:cNvPr id="15" name="Rounded Rectangle 14"/>
-          <p:cNvSpPr/>
-          <p:nvPr/>
-        </p:nvSpPr>
-        <p:spPr>
-          <a:xfrm>
-            <a:off x="658368" y="3593592"/>
-            <a:ext cx="10874959" cy="896112"/>
-          </a:xfrm>
-          <a:prstGeom prst="roundRect">
-            <a:avLst>
-              <a:gd name="adj" fmla="val 6000"/>
-            </a:avLst>
-          </a:prstGeom>
-          <a:solidFill>
-            <a:srgbClr val="FFFFFF"/>
-          </a:solidFill>
-          <a:ln w="15875">
-            <a:solidFill>
-              <a:srgbClr val="CBD5E1"/>
-            </a:solidFill>
-          </a:ln>
-          <a:effectLst/>
-        </p:spPr>
-        <p:style>
-          <a:lnRef idx="1">
-            <a:schemeClr val="accent1"/>
-          </a:lnRef>
-          <a:fillRef idx="3">
-            <a:schemeClr val="accent1"/>
-          </a:fillRef>
-          <a:effectRef idx="2">
-            <a:schemeClr val="accent1"/>
-          </a:effectRef>
-          <a:fontRef idx="minor">
-            <a:schemeClr val="lt1"/>
-          </a:fontRef>
-        </p:style>
-        <p:txBody>
-          <a:bodyPr rtlCol="0" anchor="ctr"/>
-          <a:lstStyle/>
-          <a:p>
-            <a:pPr algn="ctr"/>
-          </a:p>
-        </p:txBody>
-      </p:sp>
-      <p:sp>
-        <p:nvSpPr>
-          <p:cNvPr id="16" name="Rectangle 15"/>
-          <p:cNvSpPr/>
-          <p:nvPr/>
-        </p:nvSpPr>
-        <p:spPr>
-          <a:xfrm>
-            <a:off x="658368" y="3593592"/>
-            <a:ext cx="50292" cy="896112"/>
-          </a:xfrm>
-          <a:prstGeom prst="rect">
-            <a:avLst/>
-          </a:prstGeom>
-          <a:solidFill>
-            <a:srgbClr val="B45309"/>
-          </a:solidFill>
-          <a:ln>
-            <a:noFill/>
-          </a:ln>
-          <a:effectLst/>
-        </p:spPr>
-        <p:style>
-          <a:lnRef idx="1">
-            <a:schemeClr val="accent1"/>
-          </a:lnRef>
-          <a:fillRef idx="3">
-            <a:schemeClr val="accent1"/>
-          </a:fillRef>
-          <a:effectRef idx="2">
-            <a:schemeClr val="accent1"/>
-          </a:effectRef>
-          <a:fontRef idx="minor">
-            <a:schemeClr val="lt1"/>
-          </a:fontRef>
-        </p:style>
-        <p:txBody>
-          <a:bodyPr rtlCol="0" anchor="ctr"/>
-          <a:lstStyle/>
-          <a:p>
-            <a:pPr algn="ctr"/>
-          </a:p>
-        </p:txBody>
-      </p:sp>
-      <p:sp>
-        <p:nvSpPr>
-          <p:cNvPr id="17" name="TextBox 16"/>
-          <p:cNvSpPr txBox="1"/>
-          <p:nvPr/>
-        </p:nvSpPr>
-        <p:spPr>
-          <a:xfrm>
-            <a:off x="914400" y="3712464"/>
-            <a:ext cx="10326319" cy="274320"/>
-          </a:xfrm>
-          <a:prstGeom prst="rect">
-            <a:avLst/>
-          </a:prstGeom>
-          <a:noFill/>
-        </p:spPr>
-        <p:txBody>
-          <a:bodyPr wrap="square" lIns="0" rIns="0" tIns="0" bIns="0" anchor="t">
-            <a:spAutoFit/>
-          </a:bodyPr>
-          <a:lstStyle/>
-          <a:p>
-            <a:pPr algn="l">
-              <a:lnSpc>
-                <a:spcPct val="100000"/>
-              </a:lnSpc>
-            </a:pPr>
-            <a:r>
-              <a:rPr sz="1450" b="1" i="0">
-                <a:solidFill>
-                  <a:srgbClr val="B45309"/>
-                </a:solidFill>
-                <a:latin typeface="Segoe UI Semibold"/>
-              </a:rPr>
-              <a:t>« Où est le déploiement continu ? »</a:t>
-            </a:r>
-          </a:p>
-        </p:txBody>
-      </p:sp>
-      <p:sp>
-        <p:nvSpPr>
-          <p:cNvPr id="18" name="TextBox 17"/>
-          <p:cNvSpPr txBox="1"/>
-          <p:nvPr/>
-        </p:nvSpPr>
-        <p:spPr>
-          <a:xfrm>
-            <a:off x="914400" y="4005072"/>
-            <a:ext cx="10326319" cy="457200"/>
-          </a:xfrm>
-          <a:prstGeom prst="rect">
-            <a:avLst/>
-          </a:prstGeom>
-          <a:noFill/>
-        </p:spPr>
-        <p:txBody>
-          <a:bodyPr wrap="square" lIns="0" rIns="0" tIns="0" bIns="0" anchor="t">
-            <a:spAutoFit/>
-          </a:bodyPr>
-          <a:lstStyle/>
-          <a:p>
-            <a:pPr algn="l">
-              <a:lnSpc>
-                <a:spcPct val="95000"/>
-              </a:lnSpc>
-            </a:pPr>
-            <a:r>
-              <a:rPr sz="1350" b="0" i="0">
-                <a:solidFill>
-                  <a:srgbClr val="1E293B"/>
-                </a:solidFill>
-                <a:latin typeface="Segoe UI"/>
-              </a:rPr>
-              <a:t>Il n'y en a pas. La CI valide le code et l'image, elle ne publie rien. Le déploiement est automatisé mais déclenché à la main. La suite serait un registre puis un déclenchement par la CI.</a:t>
-            </a:r>
-          </a:p>
-        </p:txBody>
-      </p:sp>
-      <p:sp>
-        <p:nvSpPr>
-          <p:cNvPr id="19" name="Rounded Rectangle 18"/>
-          <p:cNvSpPr/>
-          <p:nvPr/>
-        </p:nvSpPr>
-        <p:spPr>
-          <a:xfrm>
-            <a:off x="658368" y="4581144"/>
-            <a:ext cx="10874959" cy="896112"/>
-          </a:xfrm>
-          <a:prstGeom prst="roundRect">
-            <a:avLst>
-              <a:gd name="adj" fmla="val 6000"/>
-            </a:avLst>
-          </a:prstGeom>
-          <a:solidFill>
-            <a:srgbClr val="FFFFFF"/>
-          </a:solidFill>
-          <a:ln w="15875">
-            <a:solidFill>
-              <a:srgbClr val="CBD5E1"/>
-            </a:solidFill>
-          </a:ln>
-          <a:effectLst/>
-        </p:spPr>
-        <p:style>
-          <a:lnRef idx="1">
-            <a:schemeClr val="accent1"/>
-          </a:lnRef>
-          <a:fillRef idx="3">
-            <a:schemeClr val="accent1"/>
-          </a:fillRef>
-          <a:effectRef idx="2">
-            <a:schemeClr val="accent1"/>
-          </a:effectRef>
-          <a:fontRef idx="minor">
-            <a:schemeClr val="lt1"/>
-          </a:fontRef>
-        </p:style>
-        <p:txBody>
-          <a:bodyPr rtlCol="0" anchor="ctr"/>
-          <a:lstStyle/>
-          <a:p>
-            <a:pPr algn="ctr"/>
-          </a:p>
-        </p:txBody>
-      </p:sp>
-      <p:sp>
-        <p:nvSpPr>
-          <p:cNvPr id="20" name="Rectangle 19"/>
-          <p:cNvSpPr/>
-          <p:nvPr/>
-        </p:nvSpPr>
-        <p:spPr>
-          <a:xfrm>
-            <a:off x="658368" y="4581144"/>
-            <a:ext cx="50292" cy="896112"/>
-          </a:xfrm>
-          <a:prstGeom prst="rect">
-            <a:avLst/>
-          </a:prstGeom>
-          <a:solidFill>
-            <a:srgbClr val="B45309"/>
-          </a:solidFill>
-          <a:ln>
-            <a:noFill/>
-          </a:ln>
-          <a:effectLst/>
-        </p:spPr>
-        <p:style>
-          <a:lnRef idx="1">
-            <a:schemeClr val="accent1"/>
-          </a:lnRef>
-          <a:fillRef idx="3">
-            <a:schemeClr val="accent1"/>
-          </a:fillRef>
-          <a:effectRef idx="2">
-            <a:schemeClr val="accent1"/>
-          </a:effectRef>
-          <a:fontRef idx="minor">
-            <a:schemeClr val="lt1"/>
-          </a:fontRef>
-        </p:style>
-        <p:txBody>
-          <a:bodyPr rtlCol="0" anchor="ctr"/>
-          <a:lstStyle/>
-          <a:p>
-            <a:pPr algn="ctr"/>
-          </a:p>
-        </p:txBody>
-      </p:sp>
-      <p:sp>
-        <p:nvSpPr>
-          <p:cNvPr id="21" name="TextBox 20"/>
-          <p:cNvSpPr txBox="1"/>
-          <p:nvPr/>
-        </p:nvSpPr>
-        <p:spPr>
-          <a:xfrm>
-            <a:off x="914400" y="4700016"/>
-            <a:ext cx="10326319" cy="274320"/>
-          </a:xfrm>
-          <a:prstGeom prst="rect">
-            <a:avLst/>
-          </a:prstGeom>
-          <a:noFill/>
-        </p:spPr>
-        <p:txBody>
-          <a:bodyPr wrap="square" lIns="0" rIns="0" tIns="0" bIns="0" anchor="t">
-            <a:spAutoFit/>
-          </a:bodyPr>
-          <a:lstStyle/>
-          <a:p>
-            <a:pPr algn="l">
-              <a:lnSpc>
-                <a:spcPct val="100000"/>
-              </a:lnSpc>
-            </a:pPr>
-            <a:r>
-              <a:rPr sz="1450" b="1" i="0">
-                <a:solidFill>
-                  <a:srgbClr val="B45309"/>
-                </a:solidFill>
-                <a:latin typeface="Segoe UI Semibold"/>
-              </a:rPr>
-              <a:t>« Une seule réplique, pas de HA ? »</a:t>
-            </a:r>
-          </a:p>
-        </p:txBody>
-      </p:sp>
-      <p:sp>
-        <p:nvSpPr>
-          <p:cNvPr id="22" name="TextBox 21"/>
-          <p:cNvSpPr txBox="1"/>
-          <p:nvPr/>
-        </p:nvSpPr>
-        <p:spPr>
-          <a:xfrm>
-            <a:off x="914400" y="4992624"/>
-            <a:ext cx="10326319" cy="457200"/>
-          </a:xfrm>
-          <a:prstGeom prst="rect">
-            <a:avLst/>
-          </a:prstGeom>
-          <a:noFill/>
-        </p:spPr>
-        <p:txBody>
-          <a:bodyPr wrap="square" lIns="0" rIns="0" tIns="0" bIns="0" anchor="t">
-            <a:spAutoFit/>
-          </a:bodyPr>
-          <a:lstStyle/>
-          <a:p>
-            <a:pPr algn="l">
-              <a:lnSpc>
-                <a:spcPct val="95000"/>
-              </a:lnSpc>
-            </a:pPr>
-            <a:r>
-              <a:rPr sz="1350" b="0" i="0">
-                <a:solidFill>
-                  <a:srgbClr val="1E293B"/>
-                </a:solidFill>
-                <a:latin typeface="Segoe UI"/>
-              </a:rPr>
-              <a:t>Non. Une réplique de chaque workload. La haute disponibilité n'était pas l'objectif : je préférais prouver la persistance et le durcissement.</a:t>
+              <a:t>Les deux documents ne se répètent pas : ils se complètent. Le projet apporte ce que l'expérience ne pouvait pas démontrer.</a:t>
             </a:r>
           </a:p>
         </p:txBody>
@@ -18292,7 +18725,7 @@
                 </a:solidFill>
                 <a:latin typeface="Segoe UI Semibold"/>
               </a:rPr>
-              <a:t>Questions probables — la technique</a:t>
+              <a:t>Questions probables — le périmètre</a:t>
             </a:r>
           </a:p>
         </p:txBody>
@@ -18404,7 +18837,7 @@
             <a:avLst/>
           </a:prstGeom>
           <a:solidFill>
-            <a:srgbClr val="1D4ED8"/>
+            <a:srgbClr val="B45309"/>
           </a:solidFill>
           <a:ln>
             <a:noFill/>
@@ -18463,11 +18896,11 @@
             <a:r>
               <a:rPr sz="1450" b="1" i="0">
                 <a:solidFill>
-                  <a:srgbClr val="1D4ED8"/>
+                  <a:srgbClr val="B45309"/>
                 </a:solidFill>
                 <a:latin typeface="Segoe UI Semibold"/>
               </a:rPr>
-              <a:t>« Vos tests couvrent quoi exactement ? »</a:t>
+              <a:t>« Pourquoi pas de cloud ? »</a:t>
             </a:r>
           </a:p>
         </p:txBody>
@@ -18506,7 +18939,7 @@
                 </a:solidFill>
                 <a:latin typeface="Segoe UI"/>
               </a:rPr>
-              <a:t>38 tests SQLite en mémoire pour le domaine, plus un test d'intégration contre un vrai PostgreSQL en CI. Ils testent surtout les refus : transitions invalides, doublons, clés d'automatisation inconnues, checklist incomplète.</a:t>
+              <a:t>Budget zéro cloud assumé, et le référentiel n'exige pas le cloud pour les trois compétences obligatoires. La mise en production cloud n'est pas revendiquée.</a:t>
             </a:r>
           </a:p>
         </p:txBody>
@@ -18574,7 +19007,7 @@
             <a:avLst/>
           </a:prstGeom>
           <a:solidFill>
-            <a:srgbClr val="1D4ED8"/>
+            <a:srgbClr val="B45309"/>
           </a:solidFill>
           <a:ln>
             <a:noFill/>
@@ -18633,11 +19066,11 @@
             <a:r>
               <a:rPr sz="1450" b="1" i="0">
                 <a:solidFill>
-                  <a:srgbClr val="1D4ED8"/>
+                  <a:srgbClr val="B45309"/>
                 </a:solidFill>
                 <a:latin typeface="Segoe UI Semibold"/>
               </a:rPr>
-              <a:t>« Pourquoi SQLite si vous tournez sur PostgreSQL ? »</a:t>
+              <a:t>« Votre stockage n'est pas distant. »</a:t>
             </a:r>
           </a:p>
         </p:txBody>
@@ -18676,7 +19109,7 @@
                 </a:solidFill>
                 <a:latin typeface="Segoe UI"/>
               </a:rPr>
-              <a:t>Pour la vitesse de retour. Le risque — un comportement propre à PostgreSQL — est couvert par le test d'intégration qui rejoue le flux complet sur postgres:16-alpine dans la CI.</a:t>
+              <a:t>Exact. Le conteneur est connecté à un stockage externalisé de son cycle de vie, porté par l'hôte. En k3d, local-path reste local au nœud. Une StorageClass NFS ou CSI la remplacerait sans toucher au manifest.</a:t>
             </a:r>
           </a:p>
         </p:txBody>
@@ -18744,7 +19177,7 @@
             <a:avLst/>
           </a:prstGeom>
           <a:solidFill>
-            <a:srgbClr val="1D4ED8"/>
+            <a:srgbClr val="B45309"/>
           </a:solidFill>
           <a:ln>
             <a:noFill/>
@@ -18803,11 +19236,11 @@
             <a:r>
               <a:rPr sz="1450" b="1" i="0">
                 <a:solidFill>
-                  <a:srgbClr val="1D4ED8"/>
+                  <a:srgbClr val="B45309"/>
                 </a:solidFill>
                 <a:latin typeface="Segoe UI Semibold"/>
               </a:rPr>
-              <a:t>« Comment gérez-vous les secrets ? »</a:t>
+              <a:t>« Où est le déploiement continu ? »</a:t>
             </a:r>
           </a:p>
         </p:txBody>
@@ -18846,7 +19279,7 @@
                 </a:solidFill>
                 <a:latin typeface="Segoe UI"/>
               </a:rPr>
-              <a:t>Aucun secret versionné. Le fichier .env et le Secret Kubernetes local sont ignorés par Git ; Ansible génère le Secret au déploiement depuis des variables, surchargeables par ansible-vault.</a:t>
+              <a:t>Il n'y en a pas. La CI valide le code et l'image, elle ne publie rien. Le déploiement est automatisé mais déclenché à la main. La suite serait un registre puis un déclenchement par la CI.</a:t>
             </a:r>
           </a:p>
         </p:txBody>
@@ -18914,7 +19347,7 @@
             <a:avLst/>
           </a:prstGeom>
           <a:solidFill>
-            <a:srgbClr val="1D4ED8"/>
+            <a:srgbClr val="B45309"/>
           </a:solidFill>
           <a:ln>
             <a:noFill/>
@@ -18973,11 +19406,11 @@
             <a:r>
               <a:rPr sz="1450" b="1" i="0">
                 <a:solidFill>
-                  <a:srgbClr val="1D4ED8"/>
+                  <a:srgbClr val="B45309"/>
                 </a:solidFill>
                 <a:latin typeface="Segoe UI Semibold"/>
               </a:rPr>
-              <a:t>« Votre image est-elle sûre ? »</a:t>
+              <a:t>« Une seule réplique, pas de HA ? »</a:t>
             </a:r>
           </a:p>
         </p:txBody>
@@ -19016,7 +19449,7 @@
                 </a:solidFill>
                 <a:latin typeface="Segoe UI"/>
               </a:rPr>
-              <a:t>Elle est reproductible — base épinglée par digest, non-root, rootfs en lecture seule. Elle n'est pas exempte de vulnérabilités : 19 HIGH et 3 CRITICAL Debian sans correctif disponible, visibles dans la CI.</a:t>
+              <a:t>Non. Une réplique de chaque workload. La haute disponibilité n'était pas l'objectif : je préférais prouver la persistance et le durcissement.</a:t>
             </a:r>
           </a:p>
         </p:txBody>
@@ -19190,7 +19623,7 @@
                 </a:solidFill>
                 <a:latin typeface="Segoe UI Semibold"/>
               </a:rPr>
-              <a:t>Les chiffres et les versions</a:t>
+              <a:t>Questions probables — la technique</a:t>
             </a:r>
           </a:p>
         </p:txBody>
@@ -19248,7 +19681,7 @@
         <p:spPr>
           <a:xfrm>
             <a:off x="658368" y="1618488"/>
-            <a:ext cx="3566160" cy="2834640"/>
+            <a:ext cx="10874959" cy="896112"/>
           </a:xfrm>
           <a:prstGeom prst="roundRect">
             <a:avLst>
@@ -19296,13 +19729,13 @@
         <p:spPr>
           <a:xfrm>
             <a:off x="658368" y="1618488"/>
-            <a:ext cx="3566160" cy="50292"/>
+            <a:ext cx="50292" cy="896112"/>
           </a:xfrm>
           <a:prstGeom prst="rect">
             <a:avLst/>
           </a:prstGeom>
           <a:solidFill>
-            <a:srgbClr val="0F766E"/>
+            <a:srgbClr val="1D4ED8"/>
           </a:solidFill>
           <a:ln>
             <a:noFill/>
@@ -19339,8 +19772,8 @@
         </p:nvSpPr>
         <p:spPr>
           <a:xfrm>
-            <a:off x="914400" y="1828800"/>
-            <a:ext cx="3108960" cy="274320"/>
+            <a:off x="914400" y="1737360"/>
+            <a:ext cx="10326319" cy="274320"/>
           </a:xfrm>
           <a:prstGeom prst="rect">
             <a:avLst/>
@@ -19359,13 +19792,13 @@
               </a:lnSpc>
             </a:pPr>
             <a:r>
-              <a:rPr sz="1400" b="1" i="0">
-                <a:solidFill>
-                  <a:srgbClr val="0F766E"/>
+              <a:rPr sz="1450" b="1" i="0">
+                <a:solidFill>
+                  <a:srgbClr val="1D4ED8"/>
                 </a:solidFill>
                 <a:latin typeface="Segoe UI Semibold"/>
               </a:rPr>
-              <a:t>LE PROJET</a:t>
+              <a:t>« Vos tests couvrent quoi exactement ? »</a:t>
             </a:r>
           </a:p>
         </p:txBody>
@@ -19378,8 +19811,8 @@
         </p:nvSpPr>
         <p:spPr>
           <a:xfrm>
-            <a:off x="914400" y="2231136"/>
-            <a:ext cx="3108960" cy="411480"/>
+            <a:off x="914400" y="2029968"/>
+            <a:ext cx="10326319" cy="457200"/>
           </a:xfrm>
           <a:prstGeom prst="rect">
             <a:avLst/>
@@ -19398,183 +19831,27 @@
               </a:lnSpc>
             </a:pPr>
             <a:r>
-              <a:rPr sz="1300" b="0" i="0">
+              <a:rPr sz="1350" b="0" i="0">
                 <a:solidFill>
                   <a:srgbClr val="1E293B"/>
                 </a:solidFill>
                 <a:latin typeface="Segoe UI"/>
               </a:rPr>
-              <a:t>45 commits sur la branche du candidat</a:t>
-            </a:r>
-          </a:p>
-        </p:txBody>
-      </p:sp>
-      <p:sp>
-        <p:nvSpPr>
-          <p:cNvPr id="11" name="TextBox 10"/>
-          <p:cNvSpPr txBox="1"/>
-          <p:nvPr/>
-        </p:nvSpPr>
-        <p:spPr>
-          <a:xfrm>
-            <a:off x="914400" y="2670048"/>
-            <a:ext cx="3108960" cy="411480"/>
-          </a:xfrm>
-          <a:prstGeom prst="rect">
-            <a:avLst/>
-          </a:prstGeom>
-          <a:noFill/>
-        </p:spPr>
-        <p:txBody>
-          <a:bodyPr wrap="square" lIns="0" rIns="0" tIns="0" bIns="0" anchor="t">
-            <a:spAutoFit/>
-          </a:bodyPr>
-          <a:lstStyle/>
-          <a:p>
-            <a:pPr algn="l">
-              <a:lnSpc>
-                <a:spcPct val="95000"/>
-              </a:lnSpc>
-            </a:pPr>
-            <a:r>
-              <a:rPr sz="1300" b="0" i="0">
-                <a:solidFill>
-                  <a:srgbClr val="1E293B"/>
-                </a:solidFill>
-                <a:latin typeface="Segoe UI"/>
-              </a:rPr>
-              <a:t>6 commits de merge, 6 pull requests</a:t>
-            </a:r>
-          </a:p>
-        </p:txBody>
-      </p:sp>
-      <p:sp>
-        <p:nvSpPr>
-          <p:cNvPr id="12" name="TextBox 11"/>
-          <p:cNvSpPr txBox="1"/>
-          <p:nvPr/>
-        </p:nvSpPr>
-        <p:spPr>
-          <a:xfrm>
-            <a:off x="914400" y="3108960"/>
-            <a:ext cx="3108960" cy="411480"/>
-          </a:xfrm>
-          <a:prstGeom prst="rect">
-            <a:avLst/>
-          </a:prstGeom>
-          <a:noFill/>
-        </p:spPr>
-        <p:txBody>
-          <a:bodyPr wrap="square" lIns="0" rIns="0" tIns="0" bIns="0" anchor="t">
-            <a:spAutoFit/>
-          </a:bodyPr>
-          <a:lstStyle/>
-          <a:p>
-            <a:pPr algn="l">
-              <a:lnSpc>
-                <a:spcPct val="95000"/>
-              </a:lnSpc>
-            </a:pPr>
-            <a:r>
-              <a:rPr sz="1300" b="0" i="0">
-                <a:solidFill>
-                  <a:srgbClr val="1E293B"/>
-                </a:solidFill>
-                <a:latin typeface="Segoe UI"/>
-              </a:rPr>
-              <a:t>29 décisions d'architecture</a:t>
-            </a:r>
-          </a:p>
-        </p:txBody>
-      </p:sp>
-      <p:sp>
-        <p:nvSpPr>
-          <p:cNvPr id="13" name="TextBox 12"/>
-          <p:cNvSpPr txBox="1"/>
-          <p:nvPr/>
-        </p:nvSpPr>
-        <p:spPr>
-          <a:xfrm>
-            <a:off x="914400" y="3547872"/>
-            <a:ext cx="3108960" cy="411480"/>
-          </a:xfrm>
-          <a:prstGeom prst="rect">
-            <a:avLst/>
-          </a:prstGeom>
-          <a:noFill/>
-        </p:spPr>
-        <p:txBody>
-          <a:bodyPr wrap="square" lIns="0" rIns="0" tIns="0" bIns="0" anchor="t">
-            <a:spAutoFit/>
-          </a:bodyPr>
-          <a:lstStyle/>
-          <a:p>
-            <a:pPr algn="l">
-              <a:lnSpc>
-                <a:spcPct val="95000"/>
-              </a:lnSpc>
-            </a:pPr>
-            <a:r>
-              <a:rPr sz="1300" b="0" i="0">
-                <a:solidFill>
-                  <a:srgbClr val="1E293B"/>
-                </a:solidFill>
-                <a:latin typeface="Segoe UI"/>
-              </a:rPr>
-              <a:t>6 phases validées et datées</a:t>
-            </a:r>
-          </a:p>
-        </p:txBody>
-      </p:sp>
-      <p:sp>
-        <p:nvSpPr>
-          <p:cNvPr id="14" name="TextBox 13"/>
-          <p:cNvSpPr txBox="1"/>
-          <p:nvPr/>
-        </p:nvSpPr>
-        <p:spPr>
-          <a:xfrm>
-            <a:off x="914400" y="3986783"/>
-            <a:ext cx="3108960" cy="411480"/>
-          </a:xfrm>
-          <a:prstGeom prst="rect">
-            <a:avLst/>
-          </a:prstGeom>
-          <a:noFill/>
-        </p:spPr>
-        <p:txBody>
-          <a:bodyPr wrap="square" lIns="0" rIns="0" tIns="0" bIns="0" anchor="t">
-            <a:spAutoFit/>
-          </a:bodyPr>
-          <a:lstStyle/>
-          <a:p>
-            <a:pPr algn="l">
-              <a:lnSpc>
-                <a:spcPct val="95000"/>
-              </a:lnSpc>
-            </a:pPr>
-            <a:r>
-              <a:rPr sz="1300" b="0" i="0">
-                <a:solidFill>
-                  <a:srgbClr val="1E293B"/>
-                </a:solidFill>
-                <a:latin typeface="Segoe UI"/>
-              </a:rPr>
-              <a:t>Candidat gelé : a9ec694</a:t>
-            </a:r>
-          </a:p>
-        </p:txBody>
-      </p:sp>
-      <p:sp>
-        <p:nvSpPr>
-          <p:cNvPr id="15" name="Rounded Rectangle 14"/>
+              <a:t>38 tests SQLite en mémoire pour le domaine, plus un test d'intégration contre un vrai PostgreSQL en CI. Ils testent surtout les refus : transitions invalides, doublons, clés d'automatisation inconnues, checklist incomplète.</a:t>
+            </a:r>
+          </a:p>
+        </p:txBody>
+      </p:sp>
+      <p:sp>
+        <p:nvSpPr>
+          <p:cNvPr id="11" name="Rounded Rectangle 10"/>
           <p:cNvSpPr/>
           <p:nvPr/>
         </p:nvSpPr>
         <p:spPr>
           <a:xfrm>
-            <a:off x="4453128" y="1618488"/>
-            <a:ext cx="3566160" cy="2834640"/>
+            <a:off x="658368" y="2606040"/>
+            <a:ext cx="10874959" cy="896112"/>
           </a:xfrm>
           <a:prstGeom prst="roundRect">
             <a:avLst>
@@ -19615,20 +19892,20 @@
       </p:sp>
       <p:sp>
         <p:nvSpPr>
-          <p:cNvPr id="16" name="Rectangle 15"/>
+          <p:cNvPr id="12" name="Rectangle 11"/>
           <p:cNvSpPr/>
           <p:nvPr/>
         </p:nvSpPr>
         <p:spPr>
           <a:xfrm>
-            <a:off x="4453128" y="1618488"/>
-            <a:ext cx="3566160" cy="50292"/>
+            <a:off x="658368" y="2606040"/>
+            <a:ext cx="50292" cy="896112"/>
           </a:xfrm>
           <a:prstGeom prst="rect">
             <a:avLst/>
           </a:prstGeom>
           <a:solidFill>
-            <a:srgbClr val="0F766E"/>
+            <a:srgbClr val="1D4ED8"/>
           </a:solidFill>
           <a:ln>
             <a:noFill/>
@@ -19659,14 +19936,14 @@
       </p:sp>
       <p:sp>
         <p:nvSpPr>
-          <p:cNvPr id="17" name="TextBox 16"/>
-          <p:cNvSpPr txBox="1"/>
-          <p:nvPr/>
-        </p:nvSpPr>
-        <p:spPr>
-          <a:xfrm>
-            <a:off x="4709160" y="1828800"/>
-            <a:ext cx="3108960" cy="274320"/>
+          <p:cNvPr id="13" name="TextBox 12"/>
+          <p:cNvSpPr txBox="1"/>
+          <p:nvPr/>
+        </p:nvSpPr>
+        <p:spPr>
+          <a:xfrm>
+            <a:off x="914400" y="2724912"/>
+            <a:ext cx="10326319" cy="274320"/>
           </a:xfrm>
           <a:prstGeom prst="rect">
             <a:avLst/>
@@ -19685,27 +19962,27 @@
               </a:lnSpc>
             </a:pPr>
             <a:r>
-              <a:rPr sz="1400" b="1" i="0">
-                <a:solidFill>
-                  <a:srgbClr val="0F766E"/>
+              <a:rPr sz="1450" b="1" i="0">
+                <a:solidFill>
+                  <a:srgbClr val="1D4ED8"/>
                 </a:solidFill>
                 <a:latin typeface="Segoe UI Semibold"/>
               </a:rPr>
-              <a:t>LES TESTS</a:t>
-            </a:r>
-          </a:p>
-        </p:txBody>
-      </p:sp>
-      <p:sp>
-        <p:nvSpPr>
-          <p:cNvPr id="18" name="TextBox 17"/>
-          <p:cNvSpPr txBox="1"/>
-          <p:nvPr/>
-        </p:nvSpPr>
-        <p:spPr>
-          <a:xfrm>
-            <a:off x="4709160" y="2231136"/>
-            <a:ext cx="3108960" cy="411480"/>
+              <a:t>« Pourquoi SQLite si vous tournez sur PostgreSQL ? »</a:t>
+            </a:r>
+          </a:p>
+        </p:txBody>
+      </p:sp>
+      <p:sp>
+        <p:nvSpPr>
+          <p:cNvPr id="14" name="TextBox 13"/>
+          <p:cNvSpPr txBox="1"/>
+          <p:nvPr/>
+        </p:nvSpPr>
+        <p:spPr>
+          <a:xfrm>
+            <a:off x="914400" y="3017520"/>
+            <a:ext cx="10326319" cy="457200"/>
           </a:xfrm>
           <a:prstGeom prst="rect">
             <a:avLst/>
@@ -19724,183 +20001,27 @@
               </a:lnSpc>
             </a:pPr>
             <a:r>
-              <a:rPr sz="1300" b="0" i="0">
+              <a:rPr sz="1350" b="0" i="0">
                 <a:solidFill>
                   <a:srgbClr val="1E293B"/>
                 </a:solidFill>
                 <a:latin typeface="Segoe UI"/>
               </a:rPr>
-              <a:t>38 tests unitaires SQLite</a:t>
-            </a:r>
-          </a:p>
-        </p:txBody>
-      </p:sp>
-      <p:sp>
-        <p:nvSpPr>
-          <p:cNvPr id="19" name="TextBox 18"/>
-          <p:cNvSpPr txBox="1"/>
-          <p:nvPr/>
-        </p:nvSpPr>
-        <p:spPr>
-          <a:xfrm>
-            <a:off x="4709160" y="2670048"/>
-            <a:ext cx="3108960" cy="411480"/>
-          </a:xfrm>
-          <a:prstGeom prst="rect">
-            <a:avLst/>
-          </a:prstGeom>
-          <a:noFill/>
-        </p:spPr>
-        <p:txBody>
-          <a:bodyPr wrap="square" lIns="0" rIns="0" tIns="0" bIns="0" anchor="t">
-            <a:spAutoFit/>
-          </a:bodyPr>
-          <a:lstStyle/>
-          <a:p>
-            <a:pPr algn="l">
-              <a:lnSpc>
-                <a:spcPct val="95000"/>
-              </a:lnSpc>
-            </a:pPr>
-            <a:r>
-              <a:rPr sz="1300" b="0" i="0">
-                <a:solidFill>
-                  <a:srgbClr val="1E293B"/>
-                </a:solidFill>
-                <a:latin typeface="Segoe UI"/>
-              </a:rPr>
-              <a:t>1 test d'intégration PostgreSQL</a:t>
-            </a:r>
-          </a:p>
-        </p:txBody>
-      </p:sp>
-      <p:sp>
-        <p:nvSpPr>
-          <p:cNvPr id="20" name="TextBox 19"/>
-          <p:cNvSpPr txBox="1"/>
-          <p:nvPr/>
-        </p:nvSpPr>
-        <p:spPr>
-          <a:xfrm>
-            <a:off x="4709160" y="3108960"/>
-            <a:ext cx="3108960" cy="411480"/>
-          </a:xfrm>
-          <a:prstGeom prst="rect">
-            <a:avLst/>
-          </a:prstGeom>
-          <a:noFill/>
-        </p:spPr>
-        <p:txBody>
-          <a:bodyPr wrap="square" lIns="0" rIns="0" tIns="0" bIns="0" anchor="t">
-            <a:spAutoFit/>
-          </a:bodyPr>
-          <a:lstStyle/>
-          <a:p>
-            <a:pPr algn="l">
-              <a:lnSpc>
-                <a:spcPct val="95000"/>
-              </a:lnSpc>
-            </a:pPr>
-            <a:r>
-              <a:rPr sz="1300" b="0" i="0">
-                <a:solidFill>
-                  <a:srgbClr val="1E293B"/>
-                </a:solidFill>
-                <a:latin typeface="Segoe UI"/>
-              </a:rPr>
-              <a:t>Base éphémère au nom unique</a:t>
-            </a:r>
-          </a:p>
-        </p:txBody>
-      </p:sp>
-      <p:sp>
-        <p:nvSpPr>
-          <p:cNvPr id="21" name="TextBox 20"/>
-          <p:cNvSpPr txBox="1"/>
-          <p:nvPr/>
-        </p:nvSpPr>
-        <p:spPr>
-          <a:xfrm>
-            <a:off x="4709160" y="3547872"/>
-            <a:ext cx="3108960" cy="411480"/>
-          </a:xfrm>
-          <a:prstGeom prst="rect">
-            <a:avLst/>
-          </a:prstGeom>
-          <a:noFill/>
-        </p:spPr>
-        <p:txBody>
-          <a:bodyPr wrap="square" lIns="0" rIns="0" tIns="0" bIns="0" anchor="t">
-            <a:spAutoFit/>
-          </a:bodyPr>
-          <a:lstStyle/>
-          <a:p>
-            <a:pPr algn="l">
-              <a:lnSpc>
-                <a:spcPct val="95000"/>
-              </a:lnSpc>
-            </a:pPr>
-            <a:r>
-              <a:rPr sz="1300" b="0" i="0">
-                <a:solidFill>
-                  <a:srgbClr val="1E293B"/>
-                </a:solidFill>
-                <a:latin typeface="Segoe UI"/>
-              </a:rPr>
-              <a:t>Lint Ruff en amont</a:t>
-            </a:r>
-          </a:p>
-        </p:txBody>
-      </p:sp>
-      <p:sp>
-        <p:nvSpPr>
-          <p:cNvPr id="22" name="TextBox 21"/>
-          <p:cNvSpPr txBox="1"/>
-          <p:nvPr/>
-        </p:nvSpPr>
-        <p:spPr>
-          <a:xfrm>
-            <a:off x="4709160" y="3986783"/>
-            <a:ext cx="3108960" cy="411480"/>
-          </a:xfrm>
-          <a:prstGeom prst="rect">
-            <a:avLst/>
-          </a:prstGeom>
-          <a:noFill/>
-        </p:spPr>
-        <p:txBody>
-          <a:bodyPr wrap="square" lIns="0" rIns="0" tIns="0" bIns="0" anchor="t">
-            <a:spAutoFit/>
-          </a:bodyPr>
-          <a:lstStyle/>
-          <a:p>
-            <a:pPr algn="l">
-              <a:lnSpc>
-                <a:spcPct val="95000"/>
-              </a:lnSpc>
-            </a:pPr>
-            <a:r>
-              <a:rPr sz="1300" b="0" i="0">
-                <a:solidFill>
-                  <a:srgbClr val="1E293B"/>
-                </a:solidFill>
-                <a:latin typeface="Segoe UI"/>
-              </a:rPr>
-              <a:t>CI verte sur le candidat final</a:t>
-            </a:r>
-          </a:p>
-        </p:txBody>
-      </p:sp>
-      <p:sp>
-        <p:nvSpPr>
-          <p:cNvPr id="23" name="Rounded Rectangle 22"/>
+              <a:t>Pour la vitesse de retour. Le risque — un comportement propre à PostgreSQL — est couvert par le test d'intégration qui rejoue le flux complet sur postgres:16-alpine dans la CI.</a:t>
+            </a:r>
+          </a:p>
+        </p:txBody>
+      </p:sp>
+      <p:sp>
+        <p:nvSpPr>
+          <p:cNvPr id="15" name="Rounded Rectangle 14"/>
           <p:cNvSpPr/>
           <p:nvPr/>
         </p:nvSpPr>
         <p:spPr>
           <a:xfrm>
-            <a:off x="8247888" y="1618488"/>
-            <a:ext cx="3566160" cy="2834640"/>
+            <a:off x="658368" y="3593592"/>
+            <a:ext cx="10874959" cy="896112"/>
           </a:xfrm>
           <a:prstGeom prst="roundRect">
             <a:avLst>
@@ -19941,20 +20062,20 @@
       </p:sp>
       <p:sp>
         <p:nvSpPr>
-          <p:cNvPr id="24" name="Rectangle 23"/>
+          <p:cNvPr id="16" name="Rectangle 15"/>
           <p:cNvSpPr/>
           <p:nvPr/>
         </p:nvSpPr>
         <p:spPr>
           <a:xfrm>
-            <a:off x="8247888" y="1618488"/>
-            <a:ext cx="3566160" cy="50292"/>
+            <a:off x="658368" y="3593592"/>
+            <a:ext cx="50292" cy="896112"/>
           </a:xfrm>
           <a:prstGeom prst="rect">
             <a:avLst/>
           </a:prstGeom>
           <a:solidFill>
-            <a:srgbClr val="0F766E"/>
+            <a:srgbClr val="1D4ED8"/>
           </a:solidFill>
           <a:ln>
             <a:noFill/>
@@ -19985,14 +20106,14 @@
       </p:sp>
       <p:sp>
         <p:nvSpPr>
-          <p:cNvPr id="25" name="TextBox 24"/>
-          <p:cNvSpPr txBox="1"/>
-          <p:nvPr/>
-        </p:nvSpPr>
-        <p:spPr>
-          <a:xfrm>
-            <a:off x="8503920" y="1828800"/>
-            <a:ext cx="3108960" cy="274320"/>
+          <p:cNvPr id="17" name="TextBox 16"/>
+          <p:cNvSpPr txBox="1"/>
+          <p:nvPr/>
+        </p:nvSpPr>
+        <p:spPr>
+          <a:xfrm>
+            <a:off x="914400" y="3712464"/>
+            <a:ext cx="10326319" cy="274320"/>
           </a:xfrm>
           <a:prstGeom prst="rect">
             <a:avLst/>
@@ -20011,27 +20132,27 @@
               </a:lnSpc>
             </a:pPr>
             <a:r>
-              <a:rPr sz="1400" b="1" i="0">
-                <a:solidFill>
-                  <a:srgbClr val="0F766E"/>
+              <a:rPr sz="1450" b="1" i="0">
+                <a:solidFill>
+                  <a:srgbClr val="1D4ED8"/>
                 </a:solidFill>
                 <a:latin typeface="Segoe UI Semibold"/>
               </a:rPr>
-              <a:t>LA PLATEFORME</a:t>
-            </a:r>
-          </a:p>
-        </p:txBody>
-      </p:sp>
-      <p:sp>
-        <p:nvSpPr>
-          <p:cNvPr id="26" name="TextBox 25"/>
-          <p:cNvSpPr txBox="1"/>
-          <p:nvPr/>
-        </p:nvSpPr>
-        <p:spPr>
-          <a:xfrm>
-            <a:off x="8503920" y="2231136"/>
-            <a:ext cx="3108960" cy="411480"/>
+              <a:t>« Comment gérez-vous les secrets ? »</a:t>
+            </a:r>
+          </a:p>
+        </p:txBody>
+      </p:sp>
+      <p:sp>
+        <p:nvSpPr>
+          <p:cNvPr id="18" name="TextBox 17"/>
+          <p:cNvSpPr txBox="1"/>
+          <p:nvPr/>
+        </p:nvSpPr>
+        <p:spPr>
+          <a:xfrm>
+            <a:off x="914400" y="4005072"/>
+            <a:ext cx="10326319" cy="457200"/>
           </a:xfrm>
           <a:prstGeom prst="rect">
             <a:avLst/>
@@ -20050,27 +20171,158 @@
               </a:lnSpc>
             </a:pPr>
             <a:r>
-              <a:rPr sz="1300" b="0" i="0">
+              <a:rPr sz="1350" b="0" i="0">
                 <a:solidFill>
                   <a:srgbClr val="1E293B"/>
                 </a:solidFill>
                 <a:latin typeface="Segoe UI"/>
               </a:rPr>
-              <a:t>Python 3.12, FastAPI, SQLAlchemy 2</a:t>
-            </a:r>
-          </a:p>
-        </p:txBody>
-      </p:sp>
-      <p:sp>
-        <p:nvSpPr>
-          <p:cNvPr id="27" name="TextBox 26"/>
-          <p:cNvSpPr txBox="1"/>
-          <p:nvPr/>
-        </p:nvSpPr>
-        <p:spPr>
-          <a:xfrm>
-            <a:off x="8503920" y="2670048"/>
-            <a:ext cx="3108960" cy="411480"/>
+              <a:t>Aucun secret versionné. Le fichier .env et le Secret Kubernetes local sont ignorés par Git ; Ansible génère le Secret au déploiement depuis des variables, surchargeables par ansible-vault.</a:t>
+            </a:r>
+          </a:p>
+        </p:txBody>
+      </p:sp>
+      <p:sp>
+        <p:nvSpPr>
+          <p:cNvPr id="19" name="Rounded Rectangle 18"/>
+          <p:cNvSpPr/>
+          <p:nvPr/>
+        </p:nvSpPr>
+        <p:spPr>
+          <a:xfrm>
+            <a:off x="658368" y="4581144"/>
+            <a:ext cx="10874959" cy="896112"/>
+          </a:xfrm>
+          <a:prstGeom prst="roundRect">
+            <a:avLst>
+              <a:gd name="adj" fmla="val 6000"/>
+            </a:avLst>
+          </a:prstGeom>
+          <a:solidFill>
+            <a:srgbClr val="FFFFFF"/>
+          </a:solidFill>
+          <a:ln w="15875">
+            <a:solidFill>
+              <a:srgbClr val="CBD5E1"/>
+            </a:solidFill>
+          </a:ln>
+          <a:effectLst/>
+        </p:spPr>
+        <p:style>
+          <a:lnRef idx="1">
+            <a:schemeClr val="accent1"/>
+          </a:lnRef>
+          <a:fillRef idx="3">
+            <a:schemeClr val="accent1"/>
+          </a:fillRef>
+          <a:effectRef idx="2">
+            <a:schemeClr val="accent1"/>
+          </a:effectRef>
+          <a:fontRef idx="minor">
+            <a:schemeClr val="lt1"/>
+          </a:fontRef>
+        </p:style>
+        <p:txBody>
+          <a:bodyPr rtlCol="0" anchor="ctr"/>
+          <a:lstStyle/>
+          <a:p>
+            <a:pPr algn="ctr"/>
+          </a:p>
+        </p:txBody>
+      </p:sp>
+      <p:sp>
+        <p:nvSpPr>
+          <p:cNvPr id="20" name="Rectangle 19"/>
+          <p:cNvSpPr/>
+          <p:nvPr/>
+        </p:nvSpPr>
+        <p:spPr>
+          <a:xfrm>
+            <a:off x="658368" y="4581144"/>
+            <a:ext cx="50292" cy="896112"/>
+          </a:xfrm>
+          <a:prstGeom prst="rect">
+            <a:avLst/>
+          </a:prstGeom>
+          <a:solidFill>
+            <a:srgbClr val="1D4ED8"/>
+          </a:solidFill>
+          <a:ln>
+            <a:noFill/>
+          </a:ln>
+          <a:effectLst/>
+        </p:spPr>
+        <p:style>
+          <a:lnRef idx="1">
+            <a:schemeClr val="accent1"/>
+          </a:lnRef>
+          <a:fillRef idx="3">
+            <a:schemeClr val="accent1"/>
+          </a:fillRef>
+          <a:effectRef idx="2">
+            <a:schemeClr val="accent1"/>
+          </a:effectRef>
+          <a:fontRef idx="minor">
+            <a:schemeClr val="lt1"/>
+          </a:fontRef>
+        </p:style>
+        <p:txBody>
+          <a:bodyPr rtlCol="0" anchor="ctr"/>
+          <a:lstStyle/>
+          <a:p>
+            <a:pPr algn="ctr"/>
+          </a:p>
+        </p:txBody>
+      </p:sp>
+      <p:sp>
+        <p:nvSpPr>
+          <p:cNvPr id="21" name="TextBox 20"/>
+          <p:cNvSpPr txBox="1"/>
+          <p:nvPr/>
+        </p:nvSpPr>
+        <p:spPr>
+          <a:xfrm>
+            <a:off x="914400" y="4700016"/>
+            <a:ext cx="10326319" cy="274320"/>
+          </a:xfrm>
+          <a:prstGeom prst="rect">
+            <a:avLst/>
+          </a:prstGeom>
+          <a:noFill/>
+        </p:spPr>
+        <p:txBody>
+          <a:bodyPr wrap="square" lIns="0" rIns="0" tIns="0" bIns="0" anchor="t">
+            <a:spAutoFit/>
+          </a:bodyPr>
+          <a:lstStyle/>
+          <a:p>
+            <a:pPr algn="l">
+              <a:lnSpc>
+                <a:spcPct val="100000"/>
+              </a:lnSpc>
+            </a:pPr>
+            <a:r>
+              <a:rPr sz="1450" b="1" i="0">
+                <a:solidFill>
+                  <a:srgbClr val="1D4ED8"/>
+                </a:solidFill>
+                <a:latin typeface="Segoe UI Semibold"/>
+              </a:rPr>
+              <a:t>« Votre image est-elle sûre ? »</a:t>
+            </a:r>
+          </a:p>
+        </p:txBody>
+      </p:sp>
+      <p:sp>
+        <p:nvSpPr>
+          <p:cNvPr id="22" name="TextBox 21"/>
+          <p:cNvSpPr txBox="1"/>
+          <p:nvPr/>
+        </p:nvSpPr>
+        <p:spPr>
+          <a:xfrm>
+            <a:off x="914400" y="4992624"/>
+            <a:ext cx="10326319" cy="457200"/>
           </a:xfrm>
           <a:prstGeom prst="rect">
             <a:avLst/>
@@ -20089,130 +20341,13 @@
               </a:lnSpc>
             </a:pPr>
             <a:r>
-              <a:rPr sz="1300" b="0" i="0">
+              <a:rPr sz="1350" b="0" i="0">
                 <a:solidFill>
                   <a:srgbClr val="1E293B"/>
                 </a:solidFill>
                 <a:latin typeface="Segoe UI"/>
               </a:rPr>
-              <a:t>PostgreSQL 16 partout</a:t>
-            </a:r>
-          </a:p>
-        </p:txBody>
-      </p:sp>
-      <p:sp>
-        <p:nvSpPr>
-          <p:cNvPr id="28" name="TextBox 27"/>
-          <p:cNvSpPr txBox="1"/>
-          <p:nvPr/>
-        </p:nvSpPr>
-        <p:spPr>
-          <a:xfrm>
-            <a:off x="8503920" y="3108960"/>
-            <a:ext cx="3108960" cy="411480"/>
-          </a:xfrm>
-          <a:prstGeom prst="rect">
-            <a:avLst/>
-          </a:prstGeom>
-          <a:noFill/>
-        </p:spPr>
-        <p:txBody>
-          <a:bodyPr wrap="square" lIns="0" rIns="0" tIns="0" bIns="0" anchor="t">
-            <a:spAutoFit/>
-          </a:bodyPr>
-          <a:lstStyle/>
-          <a:p>
-            <a:pPr algn="l">
-              <a:lnSpc>
-                <a:spcPct val="95000"/>
-              </a:lnSpc>
-            </a:pPr>
-            <a:r>
-              <a:rPr sz="1300" b="0" i="0">
-                <a:solidFill>
-                  <a:srgbClr val="1E293B"/>
-                </a:solidFill>
-                <a:latin typeface="Segoe UI"/>
-              </a:rPr>
-              <a:t>k3d 5.9 / k3s 1.35, kubectl 1.34</a:t>
-            </a:r>
-          </a:p>
-        </p:txBody>
-      </p:sp>
-      <p:sp>
-        <p:nvSpPr>
-          <p:cNvPr id="29" name="TextBox 28"/>
-          <p:cNvSpPr txBox="1"/>
-          <p:nvPr/>
-        </p:nvSpPr>
-        <p:spPr>
-          <a:xfrm>
-            <a:off x="8503920" y="3547872"/>
-            <a:ext cx="3108960" cy="411480"/>
-          </a:xfrm>
-          <a:prstGeom prst="rect">
-            <a:avLst/>
-          </a:prstGeom>
-          <a:noFill/>
-        </p:spPr>
-        <p:txBody>
-          <a:bodyPr wrap="square" lIns="0" rIns="0" tIns="0" bIns="0" anchor="t">
-            <a:spAutoFit/>
-          </a:bodyPr>
-          <a:lstStyle/>
-          <a:p>
-            <a:pPr algn="l">
-              <a:lnSpc>
-                <a:spcPct val="95000"/>
-              </a:lnSpc>
-            </a:pPr>
-            <a:r>
-              <a:rPr sz="1300" b="0" i="0">
-                <a:solidFill>
-                  <a:srgbClr val="1E293B"/>
-                </a:solidFill>
-                <a:latin typeface="Segoe UI"/>
-              </a:rPr>
-              <a:t>Prometheus 2.55, Grafana 11.3</a:t>
-            </a:r>
-          </a:p>
-        </p:txBody>
-      </p:sp>
-      <p:sp>
-        <p:nvSpPr>
-          <p:cNvPr id="30" name="TextBox 29"/>
-          <p:cNvSpPr txBox="1"/>
-          <p:nvPr/>
-        </p:nvSpPr>
-        <p:spPr>
-          <a:xfrm>
-            <a:off x="8503920" y="3986783"/>
-            <a:ext cx="3108960" cy="411480"/>
-          </a:xfrm>
-          <a:prstGeom prst="rect">
-            <a:avLst/>
-          </a:prstGeom>
-          <a:noFill/>
-        </p:spPr>
-        <p:txBody>
-          <a:bodyPr wrap="square" lIns="0" rIns="0" tIns="0" bIns="0" anchor="t">
-            <a:spAutoFit/>
-          </a:bodyPr>
-          <a:lstStyle/>
-          <a:p>
-            <a:pPr algn="l">
-              <a:lnSpc>
-                <a:spcPct val="95000"/>
-              </a:lnSpc>
-            </a:pPr>
-            <a:r>
-              <a:rPr sz="1300" b="0" i="0">
-                <a:solidFill>
-                  <a:srgbClr val="1E293B"/>
-                </a:solidFill>
-                <a:latin typeface="Segoe UI"/>
-              </a:rPr>
-              <a:t>ansible-core 2.17, kubernetes.core 6.5</a:t>
+              <a:t>Elle est reproductible — base épinglée par digest, non-root, rootfs en lecture seule. Elle n'est pas exempte de vulnérabilités : 19 HIGH et 3 CRITICAL Debian sans correctif disponible, visibles dans la CI.</a:t>
             </a:r>
           </a:p>
         </p:txBody>
@@ -20386,7 +20521,7 @@
                 </a:solidFill>
                 <a:latin typeface="Segoe UI Semibold"/>
               </a:rPr>
-              <a:t>Le domaine en détail</a:t>
+              <a:t>Les chiffres et les versions</a:t>
             </a:r>
           </a:p>
         </p:txBody>
@@ -20443,8 +20578,8 @@
         </p:nvSpPr>
         <p:spPr>
           <a:xfrm>
-            <a:off x="658368" y="1664208"/>
-            <a:ext cx="5577840" cy="2103120"/>
+            <a:off x="658368" y="1618488"/>
+            <a:ext cx="3566160" cy="2834640"/>
           </a:xfrm>
           <a:prstGeom prst="roundRect">
             <a:avLst>
@@ -20452,7 +20587,53 @@
             </a:avLst>
           </a:prstGeom>
           <a:solidFill>
-            <a:srgbClr val="0F172A"/>
+            <a:srgbClr val="FFFFFF"/>
+          </a:solidFill>
+          <a:ln w="15875">
+            <a:solidFill>
+              <a:srgbClr val="CBD5E1"/>
+            </a:solidFill>
+          </a:ln>
+          <a:effectLst/>
+        </p:spPr>
+        <p:style>
+          <a:lnRef idx="1">
+            <a:schemeClr val="accent1"/>
+          </a:lnRef>
+          <a:fillRef idx="3">
+            <a:schemeClr val="accent1"/>
+          </a:fillRef>
+          <a:effectRef idx="2">
+            <a:schemeClr val="accent1"/>
+          </a:effectRef>
+          <a:fontRef idx="minor">
+            <a:schemeClr val="lt1"/>
+          </a:fontRef>
+        </p:style>
+        <p:txBody>
+          <a:bodyPr rtlCol="0" anchor="ctr"/>
+          <a:lstStyle/>
+          <a:p>
+            <a:pPr algn="ctr"/>
+          </a:p>
+        </p:txBody>
+      </p:sp>
+      <p:sp>
+        <p:nvSpPr>
+          <p:cNvPr id="8" name="Rectangle 7"/>
+          <p:cNvSpPr/>
+          <p:nvPr/>
+        </p:nvSpPr>
+        <p:spPr>
+          <a:xfrm>
+            <a:off x="658368" y="1618488"/>
+            <a:ext cx="3566160" cy="50292"/>
+          </a:xfrm>
+          <a:prstGeom prst="rect">
+            <a:avLst/>
+          </a:prstGeom>
+          <a:solidFill>
+            <a:srgbClr val="0F766E"/>
           </a:solidFill>
           <a:ln>
             <a:noFill/>
@@ -20483,165 +20664,248 @@
       </p:sp>
       <p:sp>
         <p:nvSpPr>
-          <p:cNvPr id="8" name="TextBox 7"/>
-          <p:cNvSpPr txBox="1"/>
-          <p:nvPr/>
-        </p:nvSpPr>
-        <p:spPr>
-          <a:xfrm>
-            <a:off x="822959" y="1773936"/>
-            <a:ext cx="5248655" cy="1883663"/>
-          </a:xfrm>
-          <a:prstGeom prst="rect">
-            <a:avLst/>
-          </a:prstGeom>
-          <a:noFill/>
-        </p:spPr>
-        <p:txBody>
-          <a:bodyPr wrap="none" lIns="0" rIns="0" tIns="0" bIns="0">
-            <a:spAutoFit/>
-          </a:bodyPr>
-          <a:lstStyle/>
-          <a:p>
-            <a:pPr>
-              <a:lnSpc>
-                <a:spcPct val="115000"/>
-              </a:lnSpc>
-            </a:pPr>
-            <a:r>
-              <a:rPr sz="1300">
-                <a:solidFill>
-                  <a:srgbClr val="E2E8F0"/>
-                </a:solidFill>
-                <a:latin typeface="Consolas"/>
-              </a:rPr>
-              <a:t>ALERTE</a:t>
-            </a:r>
-          </a:p>
-          <a:p>
-            <a:pPr>
-              <a:lnSpc>
-                <a:spcPct val="115000"/>
-              </a:lnSpc>
-            </a:pPr>
-            <a:r>
-              <a:rPr sz="1300">
-                <a:solidFill>
-                  <a:srgbClr val="E2E8F0"/>
-                </a:solidFill>
-                <a:latin typeface="Consolas"/>
-              </a:rPr>
-              <a:t>  new  -&gt;  acknowledged  -&gt;  resolved</a:t>
-            </a:r>
-          </a:p>
-          <a:p>
-            <a:pPr>
-              <a:lnSpc>
-                <a:spcPct val="115000"/>
-              </a:lnSpc>
-            </a:pPr>
-            <a:r>
-              <a:rPr sz="1300">
-                <a:solidFill>
-                  <a:srgbClr val="E2E8F0"/>
-                </a:solidFill>
-                <a:latin typeface="Consolas"/>
-              </a:rPr>
-              <a:t>  new  -&gt;  resolved            (direct)</a:t>
-            </a:r>
-          </a:p>
-          <a:p>
-            <a:pPr>
-              <a:lnSpc>
-                <a:spcPct val="115000"/>
-              </a:lnSpc>
-            </a:pPr>
-            <a:r>
-              <a:rPr sz="1300">
-                <a:solidFill>
-                  <a:srgbClr val="E2E8F0"/>
-                </a:solidFill>
-                <a:latin typeface="Consolas"/>
-              </a:rPr>
-              <a:t>  transition arriere      -&gt;  409</a:t>
-            </a:r>
-          </a:p>
-          <a:p>
-            <a:pPr>
-              <a:lnSpc>
-                <a:spcPct val="115000"/>
-              </a:lnSpc>
-            </a:pPr>
-            <a:r>
-              <a:rPr sz="1300">
-                <a:solidFill>
-                  <a:srgbClr val="E2E8F0"/>
-                </a:solidFill>
-                <a:latin typeface="Consolas"/>
-              </a:rPr>
-              <a:t> </a:t>
-            </a:r>
-          </a:p>
-          <a:p>
-            <a:pPr>
-              <a:lnSpc>
-                <a:spcPct val="115000"/>
-              </a:lnSpc>
-            </a:pPr>
-            <a:r>
-              <a:rPr sz="1300">
-                <a:solidFill>
-                  <a:srgbClr val="E2E8F0"/>
-                </a:solidFill>
-                <a:latin typeface="Consolas"/>
-              </a:rPr>
-              <a:t>INCIDENT</a:t>
-            </a:r>
-          </a:p>
-          <a:p>
-            <a:pPr>
-              <a:lnSpc>
-                <a:spcPct val="115000"/>
-              </a:lnSpc>
-            </a:pPr>
-            <a:r>
-              <a:rPr sz="1300">
-                <a:solidFill>
-                  <a:srgbClr val="E2E8F0"/>
-                </a:solidFill>
-                <a:latin typeface="Consolas"/>
-              </a:rPr>
-              <a:t>  open -&gt;  investigating  -&gt;  resolved</a:t>
-            </a:r>
-          </a:p>
-          <a:p>
-            <a:pPr>
-              <a:lnSpc>
-                <a:spcPct val="115000"/>
-              </a:lnSpc>
-            </a:pPr>
-            <a:r>
-              <a:rPr sz="1300">
-                <a:solidFill>
-                  <a:srgbClr val="E2E8F0"/>
-                </a:solidFill>
-                <a:latin typeface="Consolas"/>
-              </a:rPr>
-              <a:t>  pas de reouverture      -&gt;  409</a:t>
-            </a:r>
-          </a:p>
-        </p:txBody>
-      </p:sp>
-      <p:sp>
-        <p:nvSpPr>
-          <p:cNvPr id="9" name="Rounded Rectangle 8"/>
+          <p:cNvPr id="9" name="TextBox 8"/>
+          <p:cNvSpPr txBox="1"/>
+          <p:nvPr/>
+        </p:nvSpPr>
+        <p:spPr>
+          <a:xfrm>
+            <a:off x="914400" y="1828800"/>
+            <a:ext cx="3108960" cy="274320"/>
+          </a:xfrm>
+          <a:prstGeom prst="rect">
+            <a:avLst/>
+          </a:prstGeom>
+          <a:noFill/>
+        </p:spPr>
+        <p:txBody>
+          <a:bodyPr wrap="square" lIns="0" rIns="0" tIns="0" bIns="0" anchor="t">
+            <a:spAutoFit/>
+          </a:bodyPr>
+          <a:lstStyle/>
+          <a:p>
+            <a:pPr algn="l">
+              <a:lnSpc>
+                <a:spcPct val="100000"/>
+              </a:lnSpc>
+            </a:pPr>
+            <a:r>
+              <a:rPr sz="1400" b="1" i="0">
+                <a:solidFill>
+                  <a:srgbClr val="0F766E"/>
+                </a:solidFill>
+                <a:latin typeface="Segoe UI Semibold"/>
+              </a:rPr>
+              <a:t>LE PROJET</a:t>
+            </a:r>
+          </a:p>
+        </p:txBody>
+      </p:sp>
+      <p:sp>
+        <p:nvSpPr>
+          <p:cNvPr id="10" name="TextBox 9"/>
+          <p:cNvSpPr txBox="1"/>
+          <p:nvPr/>
+        </p:nvSpPr>
+        <p:spPr>
+          <a:xfrm>
+            <a:off x="914400" y="2231136"/>
+            <a:ext cx="3108960" cy="411480"/>
+          </a:xfrm>
+          <a:prstGeom prst="rect">
+            <a:avLst/>
+          </a:prstGeom>
+          <a:noFill/>
+        </p:spPr>
+        <p:txBody>
+          <a:bodyPr wrap="square" lIns="0" rIns="0" tIns="0" bIns="0" anchor="t">
+            <a:spAutoFit/>
+          </a:bodyPr>
+          <a:lstStyle/>
+          <a:p>
+            <a:pPr algn="l">
+              <a:lnSpc>
+                <a:spcPct val="95000"/>
+              </a:lnSpc>
+            </a:pPr>
+            <a:r>
+              <a:rPr sz="1300" b="0" i="0">
+                <a:solidFill>
+                  <a:srgbClr val="1E293B"/>
+                </a:solidFill>
+                <a:latin typeface="Segoe UI"/>
+              </a:rPr>
+              <a:t>45 commits sur la branche du candidat</a:t>
+            </a:r>
+          </a:p>
+        </p:txBody>
+      </p:sp>
+      <p:sp>
+        <p:nvSpPr>
+          <p:cNvPr id="11" name="TextBox 10"/>
+          <p:cNvSpPr txBox="1"/>
+          <p:nvPr/>
+        </p:nvSpPr>
+        <p:spPr>
+          <a:xfrm>
+            <a:off x="914400" y="2670048"/>
+            <a:ext cx="3108960" cy="411480"/>
+          </a:xfrm>
+          <a:prstGeom prst="rect">
+            <a:avLst/>
+          </a:prstGeom>
+          <a:noFill/>
+        </p:spPr>
+        <p:txBody>
+          <a:bodyPr wrap="square" lIns="0" rIns="0" tIns="0" bIns="0" anchor="t">
+            <a:spAutoFit/>
+          </a:bodyPr>
+          <a:lstStyle/>
+          <a:p>
+            <a:pPr algn="l">
+              <a:lnSpc>
+                <a:spcPct val="95000"/>
+              </a:lnSpc>
+            </a:pPr>
+            <a:r>
+              <a:rPr sz="1300" b="0" i="0">
+                <a:solidFill>
+                  <a:srgbClr val="1E293B"/>
+                </a:solidFill>
+                <a:latin typeface="Segoe UI"/>
+              </a:rPr>
+              <a:t>6 commits de merge, 6 pull requests</a:t>
+            </a:r>
+          </a:p>
+        </p:txBody>
+      </p:sp>
+      <p:sp>
+        <p:nvSpPr>
+          <p:cNvPr id="12" name="TextBox 11"/>
+          <p:cNvSpPr txBox="1"/>
+          <p:nvPr/>
+        </p:nvSpPr>
+        <p:spPr>
+          <a:xfrm>
+            <a:off x="914400" y="3108960"/>
+            <a:ext cx="3108960" cy="411480"/>
+          </a:xfrm>
+          <a:prstGeom prst="rect">
+            <a:avLst/>
+          </a:prstGeom>
+          <a:noFill/>
+        </p:spPr>
+        <p:txBody>
+          <a:bodyPr wrap="square" lIns="0" rIns="0" tIns="0" bIns="0" anchor="t">
+            <a:spAutoFit/>
+          </a:bodyPr>
+          <a:lstStyle/>
+          <a:p>
+            <a:pPr algn="l">
+              <a:lnSpc>
+                <a:spcPct val="95000"/>
+              </a:lnSpc>
+            </a:pPr>
+            <a:r>
+              <a:rPr sz="1300" b="0" i="0">
+                <a:solidFill>
+                  <a:srgbClr val="1E293B"/>
+                </a:solidFill>
+                <a:latin typeface="Segoe UI"/>
+              </a:rPr>
+              <a:t>29 décisions d'architecture</a:t>
+            </a:r>
+          </a:p>
+        </p:txBody>
+      </p:sp>
+      <p:sp>
+        <p:nvSpPr>
+          <p:cNvPr id="13" name="TextBox 12"/>
+          <p:cNvSpPr txBox="1"/>
+          <p:nvPr/>
+        </p:nvSpPr>
+        <p:spPr>
+          <a:xfrm>
+            <a:off x="914400" y="3547872"/>
+            <a:ext cx="3108960" cy="411480"/>
+          </a:xfrm>
+          <a:prstGeom prst="rect">
+            <a:avLst/>
+          </a:prstGeom>
+          <a:noFill/>
+        </p:spPr>
+        <p:txBody>
+          <a:bodyPr wrap="square" lIns="0" rIns="0" tIns="0" bIns="0" anchor="t">
+            <a:spAutoFit/>
+          </a:bodyPr>
+          <a:lstStyle/>
+          <a:p>
+            <a:pPr algn="l">
+              <a:lnSpc>
+                <a:spcPct val="95000"/>
+              </a:lnSpc>
+            </a:pPr>
+            <a:r>
+              <a:rPr sz="1300" b="0" i="0">
+                <a:solidFill>
+                  <a:srgbClr val="1E293B"/>
+                </a:solidFill>
+                <a:latin typeface="Segoe UI"/>
+              </a:rPr>
+              <a:t>6 phases validées et datées</a:t>
+            </a:r>
+          </a:p>
+        </p:txBody>
+      </p:sp>
+      <p:sp>
+        <p:nvSpPr>
+          <p:cNvPr id="14" name="TextBox 13"/>
+          <p:cNvSpPr txBox="1"/>
+          <p:nvPr/>
+        </p:nvSpPr>
+        <p:spPr>
+          <a:xfrm>
+            <a:off x="914400" y="3986783"/>
+            <a:ext cx="3108960" cy="411480"/>
+          </a:xfrm>
+          <a:prstGeom prst="rect">
+            <a:avLst/>
+          </a:prstGeom>
+          <a:noFill/>
+        </p:spPr>
+        <p:txBody>
+          <a:bodyPr wrap="square" lIns="0" rIns="0" tIns="0" bIns="0" anchor="t">
+            <a:spAutoFit/>
+          </a:bodyPr>
+          <a:lstStyle/>
+          <a:p>
+            <a:pPr algn="l">
+              <a:lnSpc>
+                <a:spcPct val="95000"/>
+              </a:lnSpc>
+            </a:pPr>
+            <a:r>
+              <a:rPr sz="1300" b="0" i="0">
+                <a:solidFill>
+                  <a:srgbClr val="1E293B"/>
+                </a:solidFill>
+                <a:latin typeface="Segoe UI"/>
+              </a:rPr>
+              <a:t>Candidat gelé : a9ec694</a:t>
+            </a:r>
+          </a:p>
+        </p:txBody>
+      </p:sp>
+      <p:sp>
+        <p:nvSpPr>
+          <p:cNvPr id="15" name="Rounded Rectangle 14"/>
           <p:cNvSpPr/>
           <p:nvPr/>
         </p:nvSpPr>
         <p:spPr>
           <a:xfrm>
-            <a:off x="6693407" y="1664208"/>
-            <a:ext cx="4839919" cy="2103120"/>
+            <a:off x="4453128" y="1618488"/>
+            <a:ext cx="3566160" cy="2834640"/>
           </a:xfrm>
           <a:prstGeom prst="roundRect">
             <a:avLst>
@@ -20649,7 +20913,53 @@
             </a:avLst>
           </a:prstGeom>
           <a:solidFill>
-            <a:srgbClr val="0F172A"/>
+            <a:srgbClr val="FFFFFF"/>
+          </a:solidFill>
+          <a:ln w="15875">
+            <a:solidFill>
+              <a:srgbClr val="CBD5E1"/>
+            </a:solidFill>
+          </a:ln>
+          <a:effectLst/>
+        </p:spPr>
+        <p:style>
+          <a:lnRef idx="1">
+            <a:schemeClr val="accent1"/>
+          </a:lnRef>
+          <a:fillRef idx="3">
+            <a:schemeClr val="accent1"/>
+          </a:fillRef>
+          <a:effectRef idx="2">
+            <a:schemeClr val="accent1"/>
+          </a:effectRef>
+          <a:fontRef idx="minor">
+            <a:schemeClr val="lt1"/>
+          </a:fontRef>
+        </p:style>
+        <p:txBody>
+          <a:bodyPr rtlCol="0" anchor="ctr"/>
+          <a:lstStyle/>
+          <a:p>
+            <a:pPr algn="ctr"/>
+          </a:p>
+        </p:txBody>
+      </p:sp>
+      <p:sp>
+        <p:nvSpPr>
+          <p:cNvPr id="16" name="Rectangle 15"/>
+          <p:cNvSpPr/>
+          <p:nvPr/>
+        </p:nvSpPr>
+        <p:spPr>
+          <a:xfrm>
+            <a:off x="4453128" y="1618488"/>
+            <a:ext cx="3566160" cy="50292"/>
+          </a:xfrm>
+          <a:prstGeom prst="rect">
+            <a:avLst/>
+          </a:prstGeom>
+          <a:solidFill>
+            <a:srgbClr val="0F766E"/>
           </a:solidFill>
           <a:ln>
             <a:noFill/>
@@ -20680,229 +20990,560 @@
       </p:sp>
       <p:sp>
         <p:nvSpPr>
-          <p:cNvPr id="10" name="TextBox 9"/>
-          <p:cNvSpPr txBox="1"/>
-          <p:nvPr/>
-        </p:nvSpPr>
-        <p:spPr>
-          <a:xfrm>
-            <a:off x="6857999" y="1773936"/>
-            <a:ext cx="4510735" cy="1883663"/>
-          </a:xfrm>
-          <a:prstGeom prst="rect">
-            <a:avLst/>
-          </a:prstGeom>
-          <a:noFill/>
-        </p:spPr>
-        <p:txBody>
-          <a:bodyPr wrap="none" lIns="0" rIns="0" tIns="0" bIns="0">
-            <a:spAutoFit/>
-          </a:bodyPr>
-          <a:lstStyle/>
-          <a:p>
-            <a:pPr>
-              <a:lnSpc>
-                <a:spcPct val="115000"/>
-              </a:lnSpc>
-            </a:pPr>
-            <a:r>
-              <a:rPr sz="1300">
-                <a:solidFill>
-                  <a:srgbClr val="E2E8F0"/>
-                </a:solidFill>
-                <a:latin typeface="Consolas"/>
-              </a:rPr>
-              <a:t>REFUS TESTES</a:t>
-            </a:r>
-          </a:p>
-          <a:p>
-            <a:pPr>
-              <a:lnSpc>
-                <a:spcPct val="115000"/>
-              </a:lnSpc>
-            </a:pPr>
-            <a:r>
-              <a:rPr sz="1300">
-                <a:solidFill>
-                  <a:srgbClr val="E2E8F0"/>
-                </a:solidFill>
-                <a:latin typeface="Consolas"/>
-              </a:rPr>
-              <a:t>  2e incident actif sur l'alerte  -&gt;  409</a:t>
-            </a:r>
-          </a:p>
-          <a:p>
-            <a:pPr>
-              <a:lnSpc>
-                <a:spcPct val="115000"/>
-              </a:lnSpc>
-            </a:pPr>
-            <a:r>
-              <a:rPr sz="1300">
-                <a:solidFill>
-                  <a:srgbClr val="E2E8F0"/>
-                </a:solidFill>
-                <a:latin typeface="Consolas"/>
-              </a:rPr>
-              <a:t>  runbook manage modifie par API  -&gt;  409</a:t>
-            </a:r>
-          </a:p>
-          <a:p>
-            <a:pPr>
-              <a:lnSpc>
-                <a:spcPct val="115000"/>
-              </a:lnSpc>
-            </a:pPr>
-            <a:r>
-              <a:rPr sz="1300">
-                <a:solidFill>
-                  <a:srgbClr val="E2E8F0"/>
-                </a:solidFill>
-                <a:latin typeface="Consolas"/>
-              </a:rPr>
-              <a:t>  cle d'automatisation inconnue   -&gt;  422</a:t>
-            </a:r>
-          </a:p>
-          <a:p>
-            <a:pPr>
-              <a:lnSpc>
-                <a:spcPct val="115000"/>
-              </a:lnSpc>
-            </a:pPr>
-            <a:r>
-              <a:rPr sz="1300">
-                <a:solidFill>
-                  <a:srgbClr val="E2E8F0"/>
-                </a:solidFill>
-                <a:latin typeface="Consolas"/>
-              </a:rPr>
-              <a:t>  checklist incomplete en succes  -&gt;  refus</a:t>
-            </a:r>
-          </a:p>
-          <a:p>
-            <a:pPr>
-              <a:lnSpc>
-                <a:spcPct val="115000"/>
-              </a:lnSpc>
-            </a:pPr>
-            <a:r>
-              <a:rPr sz="1300">
-                <a:solidFill>
-                  <a:srgbClr val="E2E8F0"/>
-                </a:solidFill>
-                <a:latin typeface="Consolas"/>
-              </a:rPr>
-              <a:t>  incident resolu modifie         -&gt;  409</a:t>
-            </a:r>
-          </a:p>
-          <a:p>
-            <a:pPr>
-              <a:lnSpc>
-                <a:spcPct val="115000"/>
-              </a:lnSpc>
-            </a:pPr>
-            <a:r>
-              <a:rPr sz="1300">
-                <a:solidFill>
-                  <a:srgbClr val="E2E8F0"/>
-                </a:solidFill>
-                <a:latin typeface="Consolas"/>
-              </a:rPr>
-              <a:t> </a:t>
-            </a:r>
-          </a:p>
-          <a:p>
-            <a:pPr>
-              <a:lnSpc>
-                <a:spcPct val="115000"/>
-              </a:lnSpc>
-            </a:pPr>
-            <a:r>
-              <a:rPr sz="1300">
-                <a:solidFill>
-                  <a:srgbClr val="E2E8F0"/>
-                </a:solidFill>
-                <a:latin typeface="Consolas"/>
-              </a:rPr>
-              <a:t>  ... et l'echec controle est audite</a:t>
-            </a:r>
-          </a:p>
-        </p:txBody>
-      </p:sp>
-      <p:sp>
-        <p:nvSpPr>
-          <p:cNvPr id="11" name="TextBox 10"/>
-          <p:cNvSpPr txBox="1"/>
-          <p:nvPr/>
-        </p:nvSpPr>
-        <p:spPr>
-          <a:xfrm>
-            <a:off x="658368" y="3995928"/>
-            <a:ext cx="10874959" cy="320040"/>
-          </a:xfrm>
-          <a:prstGeom prst="rect">
-            <a:avLst/>
-          </a:prstGeom>
-          <a:noFill/>
-        </p:spPr>
-        <p:txBody>
-          <a:bodyPr wrap="square" lIns="0" rIns="0" tIns="0" bIns="0" anchor="t">
-            <a:spAutoFit/>
-          </a:bodyPr>
-          <a:lstStyle/>
-          <a:p>
-            <a:pPr algn="ctr">
+          <p:cNvPr id="17" name="TextBox 16"/>
+          <p:cNvSpPr txBox="1"/>
+          <p:nvPr/>
+        </p:nvSpPr>
+        <p:spPr>
+          <a:xfrm>
+            <a:off x="4709160" y="1828800"/>
+            <a:ext cx="3108960" cy="274320"/>
+          </a:xfrm>
+          <a:prstGeom prst="rect">
+            <a:avLst/>
+          </a:prstGeom>
+          <a:noFill/>
+        </p:spPr>
+        <p:txBody>
+          <a:bodyPr wrap="square" lIns="0" rIns="0" tIns="0" bIns="0" anchor="t">
+            <a:spAutoFit/>
+          </a:bodyPr>
+          <a:lstStyle/>
+          <a:p>
+            <a:pPr algn="l">
               <a:lnSpc>
                 <a:spcPct val="100000"/>
               </a:lnSpc>
             </a:pPr>
             <a:r>
-              <a:rPr sz="1500" b="1" i="0">
+              <a:rPr sz="1400" b="1" i="0">
+                <a:solidFill>
+                  <a:srgbClr val="0F766E"/>
+                </a:solidFill>
+                <a:latin typeface="Segoe UI Semibold"/>
+              </a:rPr>
+              <a:t>LES TESTS</a:t>
+            </a:r>
+          </a:p>
+        </p:txBody>
+      </p:sp>
+      <p:sp>
+        <p:nvSpPr>
+          <p:cNvPr id="18" name="TextBox 17"/>
+          <p:cNvSpPr txBox="1"/>
+          <p:nvPr/>
+        </p:nvSpPr>
+        <p:spPr>
+          <a:xfrm>
+            <a:off x="4709160" y="2231136"/>
+            <a:ext cx="3108960" cy="411480"/>
+          </a:xfrm>
+          <a:prstGeom prst="rect">
+            <a:avLst/>
+          </a:prstGeom>
+          <a:noFill/>
+        </p:spPr>
+        <p:txBody>
+          <a:bodyPr wrap="square" lIns="0" rIns="0" tIns="0" bIns="0" anchor="t">
+            <a:spAutoFit/>
+          </a:bodyPr>
+          <a:lstStyle/>
+          <a:p>
+            <a:pPr algn="l">
+              <a:lnSpc>
+                <a:spcPct val="95000"/>
+              </a:lnSpc>
+            </a:pPr>
+            <a:r>
+              <a:rPr sz="1300" b="0" i="0">
                 <a:solidFill>
                   <a:srgbClr val="1E293B"/>
                 </a:solidFill>
                 <a:latin typeface="Segoe UI"/>
               </a:rPr>
-              <a:t>Six objets : Service · Alert · Incident · Runbook · RunbookExecution · AuditLog</a:t>
-            </a:r>
-          </a:p>
-        </p:txBody>
-      </p:sp>
-      <p:sp>
-        <p:nvSpPr>
-          <p:cNvPr id="12" name="TextBox 11"/>
-          <p:cNvSpPr txBox="1"/>
-          <p:nvPr/>
-        </p:nvSpPr>
-        <p:spPr>
-          <a:xfrm>
-            <a:off x="658368" y="4407408"/>
-            <a:ext cx="10874959" cy="822960"/>
-          </a:xfrm>
-          <a:prstGeom prst="rect">
-            <a:avLst/>
-          </a:prstGeom>
-          <a:noFill/>
-        </p:spPr>
-        <p:txBody>
-          <a:bodyPr wrap="square" lIns="0" rIns="0" tIns="0" bIns="0" anchor="t">
-            <a:spAutoFit/>
-          </a:bodyPr>
-          <a:lstStyle/>
-          <a:p>
-            <a:pPr algn="ctr">
+              <a:t>38 tests unitaires SQLite</a:t>
+            </a:r>
+          </a:p>
+        </p:txBody>
+      </p:sp>
+      <p:sp>
+        <p:nvSpPr>
+          <p:cNvPr id="19" name="TextBox 18"/>
+          <p:cNvSpPr txBox="1"/>
+          <p:nvPr/>
+        </p:nvSpPr>
+        <p:spPr>
+          <a:xfrm>
+            <a:off x="4709160" y="2670048"/>
+            <a:ext cx="3108960" cy="411480"/>
+          </a:xfrm>
+          <a:prstGeom prst="rect">
+            <a:avLst/>
+          </a:prstGeom>
+          <a:noFill/>
+        </p:spPr>
+        <p:txBody>
+          <a:bodyPr wrap="square" lIns="0" rIns="0" tIns="0" bIns="0" anchor="t">
+            <a:spAutoFit/>
+          </a:bodyPr>
+          <a:lstStyle/>
+          <a:p>
+            <a:pPr algn="l">
+              <a:lnSpc>
+                <a:spcPct val="95000"/>
+              </a:lnSpc>
+            </a:pPr>
+            <a:r>
+              <a:rPr sz="1300" b="0" i="0">
+                <a:solidFill>
+                  <a:srgbClr val="1E293B"/>
+                </a:solidFill>
+                <a:latin typeface="Segoe UI"/>
+              </a:rPr>
+              <a:t>1 test d'intégration PostgreSQL</a:t>
+            </a:r>
+          </a:p>
+        </p:txBody>
+      </p:sp>
+      <p:sp>
+        <p:nvSpPr>
+          <p:cNvPr id="20" name="TextBox 19"/>
+          <p:cNvSpPr txBox="1"/>
+          <p:nvPr/>
+        </p:nvSpPr>
+        <p:spPr>
+          <a:xfrm>
+            <a:off x="4709160" y="3108960"/>
+            <a:ext cx="3108960" cy="411480"/>
+          </a:xfrm>
+          <a:prstGeom prst="rect">
+            <a:avLst/>
+          </a:prstGeom>
+          <a:noFill/>
+        </p:spPr>
+        <p:txBody>
+          <a:bodyPr wrap="square" lIns="0" rIns="0" tIns="0" bIns="0" anchor="t">
+            <a:spAutoFit/>
+          </a:bodyPr>
+          <a:lstStyle/>
+          <a:p>
+            <a:pPr algn="l">
+              <a:lnSpc>
+                <a:spcPct val="95000"/>
+              </a:lnSpc>
+            </a:pPr>
+            <a:r>
+              <a:rPr sz="1300" b="0" i="0">
+                <a:solidFill>
+                  <a:srgbClr val="1E293B"/>
+                </a:solidFill>
+                <a:latin typeface="Segoe UI"/>
+              </a:rPr>
+              <a:t>Base éphémère au nom unique</a:t>
+            </a:r>
+          </a:p>
+        </p:txBody>
+      </p:sp>
+      <p:sp>
+        <p:nvSpPr>
+          <p:cNvPr id="21" name="TextBox 20"/>
+          <p:cNvSpPr txBox="1"/>
+          <p:nvPr/>
+        </p:nvSpPr>
+        <p:spPr>
+          <a:xfrm>
+            <a:off x="4709160" y="3547872"/>
+            <a:ext cx="3108960" cy="411480"/>
+          </a:xfrm>
+          <a:prstGeom prst="rect">
+            <a:avLst/>
+          </a:prstGeom>
+          <a:noFill/>
+        </p:spPr>
+        <p:txBody>
+          <a:bodyPr wrap="square" lIns="0" rIns="0" tIns="0" bIns="0" anchor="t">
+            <a:spAutoFit/>
+          </a:bodyPr>
+          <a:lstStyle/>
+          <a:p>
+            <a:pPr algn="l">
+              <a:lnSpc>
+                <a:spcPct val="95000"/>
+              </a:lnSpc>
+            </a:pPr>
+            <a:r>
+              <a:rPr sz="1300" b="0" i="0">
+                <a:solidFill>
+                  <a:srgbClr val="1E293B"/>
+                </a:solidFill>
+                <a:latin typeface="Segoe UI"/>
+              </a:rPr>
+              <a:t>Lint Ruff en amont</a:t>
+            </a:r>
+          </a:p>
+        </p:txBody>
+      </p:sp>
+      <p:sp>
+        <p:nvSpPr>
+          <p:cNvPr id="22" name="TextBox 21"/>
+          <p:cNvSpPr txBox="1"/>
+          <p:nvPr/>
+        </p:nvSpPr>
+        <p:spPr>
+          <a:xfrm>
+            <a:off x="4709160" y="3986783"/>
+            <a:ext cx="3108960" cy="411480"/>
+          </a:xfrm>
+          <a:prstGeom prst="rect">
+            <a:avLst/>
+          </a:prstGeom>
+          <a:noFill/>
+        </p:spPr>
+        <p:txBody>
+          <a:bodyPr wrap="square" lIns="0" rIns="0" tIns="0" bIns="0" anchor="t">
+            <a:spAutoFit/>
+          </a:bodyPr>
+          <a:lstStyle/>
+          <a:p>
+            <a:pPr algn="l">
+              <a:lnSpc>
+                <a:spcPct val="95000"/>
+              </a:lnSpc>
+            </a:pPr>
+            <a:r>
+              <a:rPr sz="1300" b="0" i="0">
+                <a:solidFill>
+                  <a:srgbClr val="1E293B"/>
+                </a:solidFill>
+                <a:latin typeface="Segoe UI"/>
+              </a:rPr>
+              <a:t>CI verte sur le candidat final</a:t>
+            </a:r>
+          </a:p>
+        </p:txBody>
+      </p:sp>
+      <p:sp>
+        <p:nvSpPr>
+          <p:cNvPr id="23" name="Rounded Rectangle 22"/>
+          <p:cNvSpPr/>
+          <p:nvPr/>
+        </p:nvSpPr>
+        <p:spPr>
+          <a:xfrm>
+            <a:off x="8247888" y="1618488"/>
+            <a:ext cx="3566160" cy="2834640"/>
+          </a:xfrm>
+          <a:prstGeom prst="roundRect">
+            <a:avLst>
+              <a:gd name="adj" fmla="val 6000"/>
+            </a:avLst>
+          </a:prstGeom>
+          <a:solidFill>
+            <a:srgbClr val="FFFFFF"/>
+          </a:solidFill>
+          <a:ln w="15875">
+            <a:solidFill>
+              <a:srgbClr val="CBD5E1"/>
+            </a:solidFill>
+          </a:ln>
+          <a:effectLst/>
+        </p:spPr>
+        <p:style>
+          <a:lnRef idx="1">
+            <a:schemeClr val="accent1"/>
+          </a:lnRef>
+          <a:fillRef idx="3">
+            <a:schemeClr val="accent1"/>
+          </a:fillRef>
+          <a:effectRef idx="2">
+            <a:schemeClr val="accent1"/>
+          </a:effectRef>
+          <a:fontRef idx="minor">
+            <a:schemeClr val="lt1"/>
+          </a:fontRef>
+        </p:style>
+        <p:txBody>
+          <a:bodyPr rtlCol="0" anchor="ctr"/>
+          <a:lstStyle/>
+          <a:p>
+            <a:pPr algn="ctr"/>
+          </a:p>
+        </p:txBody>
+      </p:sp>
+      <p:sp>
+        <p:nvSpPr>
+          <p:cNvPr id="24" name="Rectangle 23"/>
+          <p:cNvSpPr/>
+          <p:nvPr/>
+        </p:nvSpPr>
+        <p:spPr>
+          <a:xfrm>
+            <a:off x="8247888" y="1618488"/>
+            <a:ext cx="3566160" cy="50292"/>
+          </a:xfrm>
+          <a:prstGeom prst="rect">
+            <a:avLst/>
+          </a:prstGeom>
+          <a:solidFill>
+            <a:srgbClr val="0F766E"/>
+          </a:solidFill>
+          <a:ln>
+            <a:noFill/>
+          </a:ln>
+          <a:effectLst/>
+        </p:spPr>
+        <p:style>
+          <a:lnRef idx="1">
+            <a:schemeClr val="accent1"/>
+          </a:lnRef>
+          <a:fillRef idx="3">
+            <a:schemeClr val="accent1"/>
+          </a:fillRef>
+          <a:effectRef idx="2">
+            <a:schemeClr val="accent1"/>
+          </a:effectRef>
+          <a:fontRef idx="minor">
+            <a:schemeClr val="lt1"/>
+          </a:fontRef>
+        </p:style>
+        <p:txBody>
+          <a:bodyPr rtlCol="0" anchor="ctr"/>
+          <a:lstStyle/>
+          <a:p>
+            <a:pPr algn="ctr"/>
+          </a:p>
+        </p:txBody>
+      </p:sp>
+      <p:sp>
+        <p:nvSpPr>
+          <p:cNvPr id="25" name="TextBox 24"/>
+          <p:cNvSpPr txBox="1"/>
+          <p:nvPr/>
+        </p:nvSpPr>
+        <p:spPr>
+          <a:xfrm>
+            <a:off x="8503920" y="1828800"/>
+            <a:ext cx="3108960" cy="274320"/>
+          </a:xfrm>
+          <a:prstGeom prst="rect">
+            <a:avLst/>
+          </a:prstGeom>
+          <a:noFill/>
+        </p:spPr>
+        <p:txBody>
+          <a:bodyPr wrap="square" lIns="0" rIns="0" tIns="0" bIns="0" anchor="t">
+            <a:spAutoFit/>
+          </a:bodyPr>
+          <a:lstStyle/>
+          <a:p>
+            <a:pPr algn="l">
               <a:lnSpc>
                 <a:spcPct val="100000"/>
               </a:lnSpc>
             </a:pPr>
             <a:r>
-              <a:rPr sz="1450" b="0" i="0">
-                <a:solidFill>
-                  <a:srgbClr val="64748B"/>
+              <a:rPr sz="1400" b="1" i="0">
+                <a:solidFill>
+                  <a:srgbClr val="0F766E"/>
+                </a:solidFill>
+                <a:latin typeface="Segoe UI Semibold"/>
+              </a:rPr>
+              <a:t>LA PLATEFORME</a:t>
+            </a:r>
+          </a:p>
+        </p:txBody>
+      </p:sp>
+      <p:sp>
+        <p:nvSpPr>
+          <p:cNvPr id="26" name="TextBox 25"/>
+          <p:cNvSpPr txBox="1"/>
+          <p:nvPr/>
+        </p:nvSpPr>
+        <p:spPr>
+          <a:xfrm>
+            <a:off x="8503920" y="2231136"/>
+            <a:ext cx="3108960" cy="411480"/>
+          </a:xfrm>
+          <a:prstGeom prst="rect">
+            <a:avLst/>
+          </a:prstGeom>
+          <a:noFill/>
+        </p:spPr>
+        <p:txBody>
+          <a:bodyPr wrap="square" lIns="0" rIns="0" tIns="0" bIns="0" anchor="t">
+            <a:spAutoFit/>
+          </a:bodyPr>
+          <a:lstStyle/>
+          <a:p>
+            <a:pPr algn="l">
+              <a:lnSpc>
+                <a:spcPct val="95000"/>
+              </a:lnSpc>
+            </a:pPr>
+            <a:r>
+              <a:rPr sz="1300" b="0" i="0">
+                <a:solidFill>
+                  <a:srgbClr val="1E293B"/>
                 </a:solidFill>
                 <a:latin typeface="Segoe UI"/>
               </a:rPr>
-              <a:t>L'incident hérite du service de son alerte source. Résoudre l'incident ne résout pas l'alerte : le cycle du signal et celui de la prise en charge sont indépendants — c'est un choix de modélisation, pas un oubli.</a:t>
+              <a:t>Python 3.12, FastAPI, SQLAlchemy 2</a:t>
+            </a:r>
+          </a:p>
+        </p:txBody>
+      </p:sp>
+      <p:sp>
+        <p:nvSpPr>
+          <p:cNvPr id="27" name="TextBox 26"/>
+          <p:cNvSpPr txBox="1"/>
+          <p:nvPr/>
+        </p:nvSpPr>
+        <p:spPr>
+          <a:xfrm>
+            <a:off x="8503920" y="2670048"/>
+            <a:ext cx="3108960" cy="411480"/>
+          </a:xfrm>
+          <a:prstGeom prst="rect">
+            <a:avLst/>
+          </a:prstGeom>
+          <a:noFill/>
+        </p:spPr>
+        <p:txBody>
+          <a:bodyPr wrap="square" lIns="0" rIns="0" tIns="0" bIns="0" anchor="t">
+            <a:spAutoFit/>
+          </a:bodyPr>
+          <a:lstStyle/>
+          <a:p>
+            <a:pPr algn="l">
+              <a:lnSpc>
+                <a:spcPct val="95000"/>
+              </a:lnSpc>
+            </a:pPr>
+            <a:r>
+              <a:rPr sz="1300" b="0" i="0">
+                <a:solidFill>
+                  <a:srgbClr val="1E293B"/>
+                </a:solidFill>
+                <a:latin typeface="Segoe UI"/>
+              </a:rPr>
+              <a:t>PostgreSQL 16 partout</a:t>
+            </a:r>
+          </a:p>
+        </p:txBody>
+      </p:sp>
+      <p:sp>
+        <p:nvSpPr>
+          <p:cNvPr id="28" name="TextBox 27"/>
+          <p:cNvSpPr txBox="1"/>
+          <p:nvPr/>
+        </p:nvSpPr>
+        <p:spPr>
+          <a:xfrm>
+            <a:off x="8503920" y="3108960"/>
+            <a:ext cx="3108960" cy="411480"/>
+          </a:xfrm>
+          <a:prstGeom prst="rect">
+            <a:avLst/>
+          </a:prstGeom>
+          <a:noFill/>
+        </p:spPr>
+        <p:txBody>
+          <a:bodyPr wrap="square" lIns="0" rIns="0" tIns="0" bIns="0" anchor="t">
+            <a:spAutoFit/>
+          </a:bodyPr>
+          <a:lstStyle/>
+          <a:p>
+            <a:pPr algn="l">
+              <a:lnSpc>
+                <a:spcPct val="95000"/>
+              </a:lnSpc>
+            </a:pPr>
+            <a:r>
+              <a:rPr sz="1300" b="0" i="0">
+                <a:solidFill>
+                  <a:srgbClr val="1E293B"/>
+                </a:solidFill>
+                <a:latin typeface="Segoe UI"/>
+              </a:rPr>
+              <a:t>k3d 5.9 / k3s 1.35, kubectl 1.34</a:t>
+            </a:r>
+          </a:p>
+        </p:txBody>
+      </p:sp>
+      <p:sp>
+        <p:nvSpPr>
+          <p:cNvPr id="29" name="TextBox 28"/>
+          <p:cNvSpPr txBox="1"/>
+          <p:nvPr/>
+        </p:nvSpPr>
+        <p:spPr>
+          <a:xfrm>
+            <a:off x="8503920" y="3547872"/>
+            <a:ext cx="3108960" cy="411480"/>
+          </a:xfrm>
+          <a:prstGeom prst="rect">
+            <a:avLst/>
+          </a:prstGeom>
+          <a:noFill/>
+        </p:spPr>
+        <p:txBody>
+          <a:bodyPr wrap="square" lIns="0" rIns="0" tIns="0" bIns="0" anchor="t">
+            <a:spAutoFit/>
+          </a:bodyPr>
+          <a:lstStyle/>
+          <a:p>
+            <a:pPr algn="l">
+              <a:lnSpc>
+                <a:spcPct val="95000"/>
+              </a:lnSpc>
+            </a:pPr>
+            <a:r>
+              <a:rPr sz="1300" b="0" i="0">
+                <a:solidFill>
+                  <a:srgbClr val="1E293B"/>
+                </a:solidFill>
+                <a:latin typeface="Segoe UI"/>
+              </a:rPr>
+              <a:t>Prometheus 2.55, Grafana 11.3</a:t>
+            </a:r>
+          </a:p>
+        </p:txBody>
+      </p:sp>
+      <p:sp>
+        <p:nvSpPr>
+          <p:cNvPr id="30" name="TextBox 29"/>
+          <p:cNvSpPr txBox="1"/>
+          <p:nvPr/>
+        </p:nvSpPr>
+        <p:spPr>
+          <a:xfrm>
+            <a:off x="8503920" y="3986783"/>
+            <a:ext cx="3108960" cy="411480"/>
+          </a:xfrm>
+          <a:prstGeom prst="rect">
+            <a:avLst/>
+          </a:prstGeom>
+          <a:noFill/>
+        </p:spPr>
+        <p:txBody>
+          <a:bodyPr wrap="square" lIns="0" rIns="0" tIns="0" bIns="0" anchor="t">
+            <a:spAutoFit/>
+          </a:bodyPr>
+          <a:lstStyle/>
+          <a:p>
+            <a:pPr algn="l">
+              <a:lnSpc>
+                <a:spcPct val="95000"/>
+              </a:lnSpc>
+            </a:pPr>
+            <a:r>
+              <a:rPr sz="1300" b="0" i="0">
+                <a:solidFill>
+                  <a:srgbClr val="1E293B"/>
+                </a:solidFill>
+                <a:latin typeface="Segoe UI"/>
+              </a:rPr>
+              <a:t>ansible-core 2.17, kubernetes.core 6.5</a:t>
             </a:r>
           </a:p>
         </p:txBody>
@@ -20960,6 +21601,696 @@
                 <a:latin typeface="Segoe UI"/>
               </a:rPr>
               <a:t>24</a:t>
+            </a:r>
+          </a:p>
+        </p:txBody>
+      </p:sp>
+      <p:sp>
+        <p:nvSpPr>
+          <p:cNvPr id="3" name="TextBox 2"/>
+          <p:cNvSpPr txBox="1"/>
+          <p:nvPr/>
+        </p:nvSpPr>
+        <p:spPr>
+          <a:xfrm>
+            <a:off x="658368" y="6437376"/>
+            <a:ext cx="5486400" cy="274320"/>
+          </a:xfrm>
+          <a:prstGeom prst="rect">
+            <a:avLst/>
+          </a:prstGeom>
+          <a:noFill/>
+        </p:spPr>
+        <p:txBody>
+          <a:bodyPr wrap="square" lIns="0" rIns="0" tIns="0" bIns="0" anchor="t">
+            <a:spAutoFit/>
+          </a:bodyPr>
+          <a:lstStyle/>
+          <a:p>
+            <a:pPr algn="l">
+              <a:lnSpc>
+                <a:spcPct val="100000"/>
+              </a:lnSpc>
+            </a:pPr>
+            <a:r>
+              <a:rPr sz="1000" b="0" i="0">
+                <a:solidFill>
+                  <a:srgbClr val="64748B"/>
+                </a:solidFill>
+                <a:latin typeface="Segoe UI"/>
+              </a:rPr>
+              <a:t>OpsForge  ·  Dyllan Thouvignon</a:t>
+            </a:r>
+          </a:p>
+        </p:txBody>
+      </p:sp>
+      <p:sp>
+        <p:nvSpPr>
+          <p:cNvPr id="4" name="TextBox 3"/>
+          <p:cNvSpPr txBox="1"/>
+          <p:nvPr/>
+        </p:nvSpPr>
+        <p:spPr>
+          <a:xfrm>
+            <a:off x="658368" y="384048"/>
+            <a:ext cx="10874959" cy="256032"/>
+          </a:xfrm>
+          <a:prstGeom prst="rect">
+            <a:avLst/>
+          </a:prstGeom>
+          <a:noFill/>
+        </p:spPr>
+        <p:txBody>
+          <a:bodyPr wrap="square" lIns="0" rIns="0" tIns="0" bIns="0" anchor="t">
+            <a:spAutoFit/>
+          </a:bodyPr>
+          <a:lstStyle/>
+          <a:p>
+            <a:pPr algn="l">
+              <a:lnSpc>
+                <a:spcPct val="100000"/>
+              </a:lnSpc>
+            </a:pPr>
+            <a:r>
+              <a:rPr sz="1200" b="1" i="0">
+                <a:solidFill>
+                  <a:srgbClr val="0F766E"/>
+                </a:solidFill>
+                <a:latin typeface="Segoe UI Semibold"/>
+              </a:rPr>
+              <a:t>ANNEXE</a:t>
+            </a:r>
+          </a:p>
+        </p:txBody>
+      </p:sp>
+      <p:sp>
+        <p:nvSpPr>
+          <p:cNvPr id="5" name="TextBox 4"/>
+          <p:cNvSpPr txBox="1"/>
+          <p:nvPr/>
+        </p:nvSpPr>
+        <p:spPr>
+          <a:xfrm>
+            <a:off x="658368" y="658368"/>
+            <a:ext cx="10874959" cy="566928"/>
+          </a:xfrm>
+          <a:prstGeom prst="rect">
+            <a:avLst/>
+          </a:prstGeom>
+          <a:noFill/>
+        </p:spPr>
+        <p:txBody>
+          <a:bodyPr wrap="square" lIns="0" rIns="0" tIns="0" bIns="0" anchor="t">
+            <a:spAutoFit/>
+          </a:bodyPr>
+          <a:lstStyle/>
+          <a:p>
+            <a:pPr algn="l">
+              <a:lnSpc>
+                <a:spcPct val="95000"/>
+              </a:lnSpc>
+            </a:pPr>
+            <a:r>
+              <a:rPr sz="3000" b="1" i="0">
+                <a:solidFill>
+                  <a:srgbClr val="1E293B"/>
+                </a:solidFill>
+                <a:latin typeface="Segoe UI Semibold"/>
+              </a:rPr>
+              <a:t>Le domaine en détail</a:t>
+            </a:r>
+          </a:p>
+        </p:txBody>
+      </p:sp>
+      <p:sp>
+        <p:nvSpPr>
+          <p:cNvPr id="6" name="Rectangle 5"/>
+          <p:cNvSpPr/>
+          <p:nvPr/>
+        </p:nvSpPr>
+        <p:spPr>
+          <a:xfrm>
+            <a:off x="658368" y="1298448"/>
+            <a:ext cx="1371600" cy="41148"/>
+          </a:xfrm>
+          <a:prstGeom prst="rect">
+            <a:avLst/>
+          </a:prstGeom>
+          <a:solidFill>
+            <a:srgbClr val="0F766E"/>
+          </a:solidFill>
+          <a:ln>
+            <a:noFill/>
+          </a:ln>
+          <a:effectLst/>
+        </p:spPr>
+        <p:style>
+          <a:lnRef idx="1">
+            <a:schemeClr val="accent1"/>
+          </a:lnRef>
+          <a:fillRef idx="3">
+            <a:schemeClr val="accent1"/>
+          </a:fillRef>
+          <a:effectRef idx="2">
+            <a:schemeClr val="accent1"/>
+          </a:effectRef>
+          <a:fontRef idx="minor">
+            <a:schemeClr val="lt1"/>
+          </a:fontRef>
+        </p:style>
+        <p:txBody>
+          <a:bodyPr rtlCol="0" anchor="ctr"/>
+          <a:lstStyle/>
+          <a:p>
+            <a:pPr algn="ctr"/>
+          </a:p>
+        </p:txBody>
+      </p:sp>
+      <p:sp>
+        <p:nvSpPr>
+          <p:cNvPr id="7" name="Rounded Rectangle 6"/>
+          <p:cNvSpPr/>
+          <p:nvPr/>
+        </p:nvSpPr>
+        <p:spPr>
+          <a:xfrm>
+            <a:off x="658368" y="1664208"/>
+            <a:ext cx="5577840" cy="2103120"/>
+          </a:xfrm>
+          <a:prstGeom prst="roundRect">
+            <a:avLst>
+              <a:gd name="adj" fmla="val 6000"/>
+            </a:avLst>
+          </a:prstGeom>
+          <a:solidFill>
+            <a:srgbClr val="0F172A"/>
+          </a:solidFill>
+          <a:ln>
+            <a:noFill/>
+          </a:ln>
+          <a:effectLst/>
+        </p:spPr>
+        <p:style>
+          <a:lnRef idx="1">
+            <a:schemeClr val="accent1"/>
+          </a:lnRef>
+          <a:fillRef idx="3">
+            <a:schemeClr val="accent1"/>
+          </a:fillRef>
+          <a:effectRef idx="2">
+            <a:schemeClr val="accent1"/>
+          </a:effectRef>
+          <a:fontRef idx="minor">
+            <a:schemeClr val="lt1"/>
+          </a:fontRef>
+        </p:style>
+        <p:txBody>
+          <a:bodyPr rtlCol="0" anchor="ctr"/>
+          <a:lstStyle/>
+          <a:p>
+            <a:pPr algn="ctr"/>
+          </a:p>
+        </p:txBody>
+      </p:sp>
+      <p:sp>
+        <p:nvSpPr>
+          <p:cNvPr id="8" name="TextBox 7"/>
+          <p:cNvSpPr txBox="1"/>
+          <p:nvPr/>
+        </p:nvSpPr>
+        <p:spPr>
+          <a:xfrm>
+            <a:off x="822959" y="1773936"/>
+            <a:ext cx="5248655" cy="1883663"/>
+          </a:xfrm>
+          <a:prstGeom prst="rect">
+            <a:avLst/>
+          </a:prstGeom>
+          <a:noFill/>
+        </p:spPr>
+        <p:txBody>
+          <a:bodyPr wrap="none" lIns="0" rIns="0" tIns="0" bIns="0">
+            <a:spAutoFit/>
+          </a:bodyPr>
+          <a:lstStyle/>
+          <a:p>
+            <a:pPr>
+              <a:lnSpc>
+                <a:spcPct val="115000"/>
+              </a:lnSpc>
+            </a:pPr>
+            <a:r>
+              <a:rPr sz="1300">
+                <a:solidFill>
+                  <a:srgbClr val="E2E8F0"/>
+                </a:solidFill>
+                <a:latin typeface="Consolas"/>
+              </a:rPr>
+              <a:t>ALERTE</a:t>
+            </a:r>
+          </a:p>
+          <a:p>
+            <a:pPr>
+              <a:lnSpc>
+                <a:spcPct val="115000"/>
+              </a:lnSpc>
+            </a:pPr>
+            <a:r>
+              <a:rPr sz="1300">
+                <a:solidFill>
+                  <a:srgbClr val="E2E8F0"/>
+                </a:solidFill>
+                <a:latin typeface="Consolas"/>
+              </a:rPr>
+              <a:t>  new  -&gt;  acknowledged  -&gt;  resolved</a:t>
+            </a:r>
+          </a:p>
+          <a:p>
+            <a:pPr>
+              <a:lnSpc>
+                <a:spcPct val="115000"/>
+              </a:lnSpc>
+            </a:pPr>
+            <a:r>
+              <a:rPr sz="1300">
+                <a:solidFill>
+                  <a:srgbClr val="E2E8F0"/>
+                </a:solidFill>
+                <a:latin typeface="Consolas"/>
+              </a:rPr>
+              <a:t>  new  -&gt;  resolved            (direct)</a:t>
+            </a:r>
+          </a:p>
+          <a:p>
+            <a:pPr>
+              <a:lnSpc>
+                <a:spcPct val="115000"/>
+              </a:lnSpc>
+            </a:pPr>
+            <a:r>
+              <a:rPr sz="1300">
+                <a:solidFill>
+                  <a:srgbClr val="E2E8F0"/>
+                </a:solidFill>
+                <a:latin typeface="Consolas"/>
+              </a:rPr>
+              <a:t>  transition arriere      -&gt;  409</a:t>
+            </a:r>
+          </a:p>
+          <a:p>
+            <a:pPr>
+              <a:lnSpc>
+                <a:spcPct val="115000"/>
+              </a:lnSpc>
+            </a:pPr>
+            <a:r>
+              <a:rPr sz="1300">
+                <a:solidFill>
+                  <a:srgbClr val="E2E8F0"/>
+                </a:solidFill>
+                <a:latin typeface="Consolas"/>
+              </a:rPr>
+              <a:t> </a:t>
+            </a:r>
+          </a:p>
+          <a:p>
+            <a:pPr>
+              <a:lnSpc>
+                <a:spcPct val="115000"/>
+              </a:lnSpc>
+            </a:pPr>
+            <a:r>
+              <a:rPr sz="1300">
+                <a:solidFill>
+                  <a:srgbClr val="E2E8F0"/>
+                </a:solidFill>
+                <a:latin typeface="Consolas"/>
+              </a:rPr>
+              <a:t>INCIDENT</a:t>
+            </a:r>
+          </a:p>
+          <a:p>
+            <a:pPr>
+              <a:lnSpc>
+                <a:spcPct val="115000"/>
+              </a:lnSpc>
+            </a:pPr>
+            <a:r>
+              <a:rPr sz="1300">
+                <a:solidFill>
+                  <a:srgbClr val="E2E8F0"/>
+                </a:solidFill>
+                <a:latin typeface="Consolas"/>
+              </a:rPr>
+              <a:t>  open -&gt;  investigating  -&gt;  resolved</a:t>
+            </a:r>
+          </a:p>
+          <a:p>
+            <a:pPr>
+              <a:lnSpc>
+                <a:spcPct val="115000"/>
+              </a:lnSpc>
+            </a:pPr>
+            <a:r>
+              <a:rPr sz="1300">
+                <a:solidFill>
+                  <a:srgbClr val="E2E8F0"/>
+                </a:solidFill>
+                <a:latin typeface="Consolas"/>
+              </a:rPr>
+              <a:t>  pas de reouverture      -&gt;  409</a:t>
+            </a:r>
+          </a:p>
+        </p:txBody>
+      </p:sp>
+      <p:sp>
+        <p:nvSpPr>
+          <p:cNvPr id="9" name="Rounded Rectangle 8"/>
+          <p:cNvSpPr/>
+          <p:nvPr/>
+        </p:nvSpPr>
+        <p:spPr>
+          <a:xfrm>
+            <a:off x="6693407" y="1664208"/>
+            <a:ext cx="4839919" cy="2103120"/>
+          </a:xfrm>
+          <a:prstGeom prst="roundRect">
+            <a:avLst>
+              <a:gd name="adj" fmla="val 6000"/>
+            </a:avLst>
+          </a:prstGeom>
+          <a:solidFill>
+            <a:srgbClr val="0F172A"/>
+          </a:solidFill>
+          <a:ln>
+            <a:noFill/>
+          </a:ln>
+          <a:effectLst/>
+        </p:spPr>
+        <p:style>
+          <a:lnRef idx="1">
+            <a:schemeClr val="accent1"/>
+          </a:lnRef>
+          <a:fillRef idx="3">
+            <a:schemeClr val="accent1"/>
+          </a:fillRef>
+          <a:effectRef idx="2">
+            <a:schemeClr val="accent1"/>
+          </a:effectRef>
+          <a:fontRef idx="minor">
+            <a:schemeClr val="lt1"/>
+          </a:fontRef>
+        </p:style>
+        <p:txBody>
+          <a:bodyPr rtlCol="0" anchor="ctr"/>
+          <a:lstStyle/>
+          <a:p>
+            <a:pPr algn="ctr"/>
+          </a:p>
+        </p:txBody>
+      </p:sp>
+      <p:sp>
+        <p:nvSpPr>
+          <p:cNvPr id="10" name="TextBox 9"/>
+          <p:cNvSpPr txBox="1"/>
+          <p:nvPr/>
+        </p:nvSpPr>
+        <p:spPr>
+          <a:xfrm>
+            <a:off x="6857999" y="1773936"/>
+            <a:ext cx="4510735" cy="1883663"/>
+          </a:xfrm>
+          <a:prstGeom prst="rect">
+            <a:avLst/>
+          </a:prstGeom>
+          <a:noFill/>
+        </p:spPr>
+        <p:txBody>
+          <a:bodyPr wrap="none" lIns="0" rIns="0" tIns="0" bIns="0">
+            <a:spAutoFit/>
+          </a:bodyPr>
+          <a:lstStyle/>
+          <a:p>
+            <a:pPr>
+              <a:lnSpc>
+                <a:spcPct val="115000"/>
+              </a:lnSpc>
+            </a:pPr>
+            <a:r>
+              <a:rPr sz="1300">
+                <a:solidFill>
+                  <a:srgbClr val="E2E8F0"/>
+                </a:solidFill>
+                <a:latin typeface="Consolas"/>
+              </a:rPr>
+              <a:t>REFUS TESTES</a:t>
+            </a:r>
+          </a:p>
+          <a:p>
+            <a:pPr>
+              <a:lnSpc>
+                <a:spcPct val="115000"/>
+              </a:lnSpc>
+            </a:pPr>
+            <a:r>
+              <a:rPr sz="1300">
+                <a:solidFill>
+                  <a:srgbClr val="E2E8F0"/>
+                </a:solidFill>
+                <a:latin typeface="Consolas"/>
+              </a:rPr>
+              <a:t>  2e incident actif sur l'alerte  -&gt;  409</a:t>
+            </a:r>
+          </a:p>
+          <a:p>
+            <a:pPr>
+              <a:lnSpc>
+                <a:spcPct val="115000"/>
+              </a:lnSpc>
+            </a:pPr>
+            <a:r>
+              <a:rPr sz="1300">
+                <a:solidFill>
+                  <a:srgbClr val="E2E8F0"/>
+                </a:solidFill>
+                <a:latin typeface="Consolas"/>
+              </a:rPr>
+              <a:t>  runbook manage modifie par API  -&gt;  409</a:t>
+            </a:r>
+          </a:p>
+          <a:p>
+            <a:pPr>
+              <a:lnSpc>
+                <a:spcPct val="115000"/>
+              </a:lnSpc>
+            </a:pPr>
+            <a:r>
+              <a:rPr sz="1300">
+                <a:solidFill>
+                  <a:srgbClr val="E2E8F0"/>
+                </a:solidFill>
+                <a:latin typeface="Consolas"/>
+              </a:rPr>
+              <a:t>  cle d'automatisation inconnue   -&gt;  422</a:t>
+            </a:r>
+          </a:p>
+          <a:p>
+            <a:pPr>
+              <a:lnSpc>
+                <a:spcPct val="115000"/>
+              </a:lnSpc>
+            </a:pPr>
+            <a:r>
+              <a:rPr sz="1300">
+                <a:solidFill>
+                  <a:srgbClr val="E2E8F0"/>
+                </a:solidFill>
+                <a:latin typeface="Consolas"/>
+              </a:rPr>
+              <a:t>  checklist incomplete en succes  -&gt;  refus</a:t>
+            </a:r>
+          </a:p>
+          <a:p>
+            <a:pPr>
+              <a:lnSpc>
+                <a:spcPct val="115000"/>
+              </a:lnSpc>
+            </a:pPr>
+            <a:r>
+              <a:rPr sz="1300">
+                <a:solidFill>
+                  <a:srgbClr val="E2E8F0"/>
+                </a:solidFill>
+                <a:latin typeface="Consolas"/>
+              </a:rPr>
+              <a:t>  incident resolu modifie         -&gt;  409</a:t>
+            </a:r>
+          </a:p>
+          <a:p>
+            <a:pPr>
+              <a:lnSpc>
+                <a:spcPct val="115000"/>
+              </a:lnSpc>
+            </a:pPr>
+            <a:r>
+              <a:rPr sz="1300">
+                <a:solidFill>
+                  <a:srgbClr val="E2E8F0"/>
+                </a:solidFill>
+                <a:latin typeface="Consolas"/>
+              </a:rPr>
+              <a:t> </a:t>
+            </a:r>
+          </a:p>
+          <a:p>
+            <a:pPr>
+              <a:lnSpc>
+                <a:spcPct val="115000"/>
+              </a:lnSpc>
+            </a:pPr>
+            <a:r>
+              <a:rPr sz="1300">
+                <a:solidFill>
+                  <a:srgbClr val="E2E8F0"/>
+                </a:solidFill>
+                <a:latin typeface="Consolas"/>
+              </a:rPr>
+              <a:t>  ... et l'echec controle est audite</a:t>
+            </a:r>
+          </a:p>
+        </p:txBody>
+      </p:sp>
+      <p:sp>
+        <p:nvSpPr>
+          <p:cNvPr id="11" name="TextBox 10"/>
+          <p:cNvSpPr txBox="1"/>
+          <p:nvPr/>
+        </p:nvSpPr>
+        <p:spPr>
+          <a:xfrm>
+            <a:off x="658368" y="3995928"/>
+            <a:ext cx="10874959" cy="320040"/>
+          </a:xfrm>
+          <a:prstGeom prst="rect">
+            <a:avLst/>
+          </a:prstGeom>
+          <a:noFill/>
+        </p:spPr>
+        <p:txBody>
+          <a:bodyPr wrap="square" lIns="0" rIns="0" tIns="0" bIns="0" anchor="t">
+            <a:spAutoFit/>
+          </a:bodyPr>
+          <a:lstStyle/>
+          <a:p>
+            <a:pPr algn="ctr">
+              <a:lnSpc>
+                <a:spcPct val="100000"/>
+              </a:lnSpc>
+            </a:pPr>
+            <a:r>
+              <a:rPr sz="1500" b="1" i="0">
+                <a:solidFill>
+                  <a:srgbClr val="1E293B"/>
+                </a:solidFill>
+                <a:latin typeface="Segoe UI"/>
+              </a:rPr>
+              <a:t>Six objets : Service · Alert · Incident · Runbook · RunbookExecution · AuditLog</a:t>
+            </a:r>
+          </a:p>
+        </p:txBody>
+      </p:sp>
+      <p:sp>
+        <p:nvSpPr>
+          <p:cNvPr id="12" name="TextBox 11"/>
+          <p:cNvSpPr txBox="1"/>
+          <p:nvPr/>
+        </p:nvSpPr>
+        <p:spPr>
+          <a:xfrm>
+            <a:off x="658368" y="4407408"/>
+            <a:ext cx="10874959" cy="822960"/>
+          </a:xfrm>
+          <a:prstGeom prst="rect">
+            <a:avLst/>
+          </a:prstGeom>
+          <a:noFill/>
+        </p:spPr>
+        <p:txBody>
+          <a:bodyPr wrap="square" lIns="0" rIns="0" tIns="0" bIns="0" anchor="t">
+            <a:spAutoFit/>
+          </a:bodyPr>
+          <a:lstStyle/>
+          <a:p>
+            <a:pPr algn="ctr">
+              <a:lnSpc>
+                <a:spcPct val="100000"/>
+              </a:lnSpc>
+            </a:pPr>
+            <a:r>
+              <a:rPr sz="1450" b="0" i="0">
+                <a:solidFill>
+                  <a:srgbClr val="64748B"/>
+                </a:solidFill>
+                <a:latin typeface="Segoe UI"/>
+              </a:rPr>
+              <a:t>L'incident hérite du service de son alerte source. Résoudre l'incident ne résout pas l'alerte : le cycle du signal et celui de la prise en charge sont indépendants — c'est un choix de modélisation, pas un oubli.</a:t>
+            </a:r>
+          </a:p>
+        </p:txBody>
+      </p:sp>
+    </p:spTree>
+  </p:cSld>
+  <p:clrMapOvr>
+    <a:masterClrMapping/>
+  </p:clrMapOvr>
+</p:sld>
+</file>
+
+<file path=ppt/slides/slide25.xml><?xml version="1.0" encoding="utf-8"?>
+<p:sld xmlns:a="http://schemas.openxmlformats.org/drawingml/2006/main" xmlns:p="http://schemas.openxmlformats.org/presentationml/2006/main" xmlns:r="http://schemas.openxmlformats.org/officeDocument/2006/relationships">
+  <p:cSld>
+    <p:spTree>
+      <p:nvGrpSpPr>
+        <p:cNvPr id="1" name=""/>
+        <p:cNvGrpSpPr/>
+        <p:nvPr/>
+      </p:nvGrpSpPr>
+      <p:grpSpPr/>
+      <p:sp>
+        <p:nvSpPr>
+          <p:cNvPr id="2" name="TextBox 1"/>
+          <p:cNvSpPr txBox="1"/>
+          <p:nvPr/>
+        </p:nvSpPr>
+        <p:spPr>
+          <a:xfrm>
+            <a:off x="10820095" y="6437376"/>
+            <a:ext cx="914400" cy="274320"/>
+          </a:xfrm>
+          <a:prstGeom prst="rect">
+            <a:avLst/>
+          </a:prstGeom>
+          <a:noFill/>
+        </p:spPr>
+        <p:txBody>
+          <a:bodyPr wrap="square" lIns="0" rIns="0" tIns="0" bIns="0" anchor="t">
+            <a:spAutoFit/>
+          </a:bodyPr>
+          <a:lstStyle/>
+          <a:p>
+            <a:pPr algn="r">
+              <a:lnSpc>
+                <a:spcPct val="100000"/>
+              </a:lnSpc>
+            </a:pPr>
+            <a:r>
+              <a:rPr sz="1000" b="0" i="0">
+                <a:solidFill>
+                  <a:srgbClr val="64748B"/>
+                </a:solidFill>
+                <a:latin typeface="Segoe UI"/>
+              </a:rPr>
+              <a:t>25</a:t>
             </a:r>
           </a:p>
         </p:txBody>
